--- a/小文智能ai项目汇报最最终版.pptx
+++ b/小文智能ai项目汇报最最终版.pptx
@@ -1,22 +1,22 @@
 
 <file path=ppt/presentation.xml><?xml version="1.0" encoding="utf-8"?>
-<p:presentation xmlns:a="http://schemas.openxmlformats.org/drawingml/2006/main" xmlns:r="http://schemas.openxmlformats.org/officeDocument/2006/relationships" xmlns:p="http://schemas.openxmlformats.org/presentationml/2006/main" saveSubsetFonts="1" autoCompressPictures="0">
+<p:presentation xmlns:a="http://schemas.openxmlformats.org/drawingml/2006/main" xmlns:r="http://schemas.openxmlformats.org/officeDocument/2006/relationships" xmlns:p="http://schemas.openxmlformats.org/presentationml/2006/main" autoCompressPictures="0">
   <p:sldMasterIdLst>
     <p:sldMasterId id="2147483648" r:id="rId1"/>
   </p:sldMasterIdLst>
   <p:sldIdLst>
-    <p:sldId id="256" r:id="rId7"/>
-    <p:sldId id="257" r:id="rId8"/>
-    <p:sldId id="258" r:id="rId9"/>
-    <p:sldId id="259" r:id="rId10"/>
-    <p:sldId id="260" r:id="rId11"/>
-    <p:sldId id="261" r:id="rId12"/>
-    <p:sldId id="262" r:id="rId13"/>
-    <p:sldId id="263" r:id="rId14"/>
-    <p:sldId id="264" r:id="rId15"/>
-    <p:sldId id="265" r:id="rId16"/>
+    <p:sldId id="256" r:id="rId3"/>
+    <p:sldId id="257" r:id="rId4"/>
+    <p:sldId id="258" r:id="rId5"/>
+    <p:sldId id="259" r:id="rId6"/>
+    <p:sldId id="260" r:id="rId7"/>
+    <p:sldId id="261" r:id="rId8"/>
+    <p:sldId id="262" r:id="rId9"/>
+    <p:sldId id="263" r:id="rId10"/>
+    <p:sldId id="264" r:id="rId11"/>
+    <p:sldId id="265" r:id="rId12"/>
   </p:sldIdLst>
-  <p:sldSz cx="12191695" cy="6858000" type="screen4x3"/>
+  <p:sldSz cx="12191365" cy="6858000" type="screen4x3"/>
   <p:notesSz cx="6858000" cy="9144000"/>
   <p:defaultTextStyle>
     <a:defPPr>
@@ -113,6 +113,22 @@
       </a:defRPr>
     </a:lvl9pPr>
   </p:defaultTextStyle>
+  <p:extLst>
+    <p:ext uri="{EFAFB233-063F-42B5-8137-9DF3F51BA10A}">
+      <p15:sldGuideLst xmlns:p15="http://schemas.microsoft.com/office/powerpoint/2012/main">
+        <p15:guide id="1" orient="horz" pos="2160" userDrawn="1">
+          <p15:clr>
+            <a:srgbClr val="A4A3A4"/>
+          </p15:clr>
+        </p15:guide>
+        <p15:guide id="2" pos="2880" userDrawn="1">
+          <p15:clr>
+            <a:srgbClr val="A4A3A4"/>
+          </p15:clr>
+        </p15:guide>
+      </p15:sldGuideLst>
+    </p:ext>
+  </p:extLst>
 </p:presentation>
 </file>
 
@@ -297,7 +313,6 @@
           <a:p>
             <a:fld id="{5BCAD085-E8A6-8845-BD4E-CB4CCA059FC4}" type="datetimeFigureOut">
               <a:rPr lang="en-US" smtClean="0"/>
-              <a:t>1/27/13</a:t>
             </a:fld>
             <a:endParaRPr lang="en-US"/>
           </a:p>
@@ -339,18 +354,12 @@
           <a:p>
             <a:fld id="{C1FF6DA9-008F-8B48-92A6-B652298478BF}" type="slidenum">
               <a:rPr lang="en-US" smtClean="0"/>
-              <a:t>‹#›</a:t>
             </a:fld>
             <a:endParaRPr lang="en-US"/>
           </a:p>
         </p:txBody>
       </p:sp>
     </p:spTree>
-    <p:extLst>
-      <p:ext uri="{BB962C8B-B14F-4D97-AF65-F5344CB8AC3E}">
-        <p14:creationId xmlns:p14="http://schemas.microsoft.com/office/powerpoint/2010/main" val="3168075583"/>
-      </p:ext>
-    </p:extLst>
   </p:cSld>
   <p:clrMapOvr>
     <a:masterClrMapping/>
@@ -418,6 +427,7 @@
               <a:rPr lang="en-US" smtClean="0"/>
               <a:t>Click to edit Master text styles</a:t>
             </a:r>
+            <a:endParaRPr lang="en-US" smtClean="0"/>
           </a:p>
           <a:p>
             <a:pPr lvl="1"/>
@@ -425,6 +435,7 @@
               <a:rPr lang="en-US" smtClean="0"/>
               <a:t>Second level</a:t>
             </a:r>
+            <a:endParaRPr lang="en-US" smtClean="0"/>
           </a:p>
           <a:p>
             <a:pPr lvl="2"/>
@@ -432,6 +443,7 @@
               <a:rPr lang="en-US" smtClean="0"/>
               <a:t>Third level</a:t>
             </a:r>
+            <a:endParaRPr lang="en-US" smtClean="0"/>
           </a:p>
           <a:p>
             <a:pPr lvl="3"/>
@@ -439,6 +451,7 @@
               <a:rPr lang="en-US" smtClean="0"/>
               <a:t>Fourth level</a:t>
             </a:r>
+            <a:endParaRPr lang="en-US" smtClean="0"/>
           </a:p>
           <a:p>
             <a:pPr lvl="4"/>
@@ -467,7 +480,6 @@
           <a:p>
             <a:fld id="{5BCAD085-E8A6-8845-BD4E-CB4CCA059FC4}" type="datetimeFigureOut">
               <a:rPr lang="en-US" smtClean="0"/>
-              <a:t>1/27/13</a:t>
             </a:fld>
             <a:endParaRPr lang="en-US"/>
           </a:p>
@@ -509,18 +521,12 @@
           <a:p>
             <a:fld id="{C1FF6DA9-008F-8B48-92A6-B652298478BF}" type="slidenum">
               <a:rPr lang="en-US" smtClean="0"/>
-              <a:t>‹#›</a:t>
             </a:fld>
             <a:endParaRPr lang="en-US"/>
           </a:p>
         </p:txBody>
       </p:sp>
     </p:spTree>
-    <p:extLst>
-      <p:ext uri="{BB962C8B-B14F-4D97-AF65-F5344CB8AC3E}">
-        <p14:creationId xmlns:p14="http://schemas.microsoft.com/office/powerpoint/2010/main" val="2910927964"/>
-      </p:ext>
-    </p:extLst>
   </p:cSld>
   <p:clrMapOvr>
     <a:masterClrMapping/>
@@ -598,6 +604,7 @@
               <a:rPr lang="en-US" smtClean="0"/>
               <a:t>Click to edit Master text styles</a:t>
             </a:r>
+            <a:endParaRPr lang="en-US" smtClean="0"/>
           </a:p>
           <a:p>
             <a:pPr lvl="1"/>
@@ -605,6 +612,7 @@
               <a:rPr lang="en-US" smtClean="0"/>
               <a:t>Second level</a:t>
             </a:r>
+            <a:endParaRPr lang="en-US" smtClean="0"/>
           </a:p>
           <a:p>
             <a:pPr lvl="2"/>
@@ -612,6 +620,7 @@
               <a:rPr lang="en-US" smtClean="0"/>
               <a:t>Third level</a:t>
             </a:r>
+            <a:endParaRPr lang="en-US" smtClean="0"/>
           </a:p>
           <a:p>
             <a:pPr lvl="3"/>
@@ -619,6 +628,7 @@
               <a:rPr lang="en-US" smtClean="0"/>
               <a:t>Fourth level</a:t>
             </a:r>
+            <a:endParaRPr lang="en-US" smtClean="0"/>
           </a:p>
           <a:p>
             <a:pPr lvl="4"/>
@@ -647,7 +657,6 @@
           <a:p>
             <a:fld id="{5BCAD085-E8A6-8845-BD4E-CB4CCA059FC4}" type="datetimeFigureOut">
               <a:rPr lang="en-US" smtClean="0"/>
-              <a:t>1/27/13</a:t>
             </a:fld>
             <a:endParaRPr lang="en-US"/>
           </a:p>
@@ -689,18 +698,12 @@
           <a:p>
             <a:fld id="{C1FF6DA9-008F-8B48-92A6-B652298478BF}" type="slidenum">
               <a:rPr lang="en-US" smtClean="0"/>
-              <a:t>‹#›</a:t>
             </a:fld>
             <a:endParaRPr lang="en-US"/>
           </a:p>
         </p:txBody>
       </p:sp>
     </p:spTree>
-    <p:extLst>
-      <p:ext uri="{BB962C8B-B14F-4D97-AF65-F5344CB8AC3E}">
-        <p14:creationId xmlns:p14="http://schemas.microsoft.com/office/powerpoint/2010/main" val="3612223792"/>
-      </p:ext>
-    </p:extLst>
   </p:cSld>
   <p:clrMapOvr>
     <a:masterClrMapping/>
@@ -768,6 +771,7 @@
               <a:rPr lang="en-US" smtClean="0"/>
               <a:t>Click to edit Master text styles</a:t>
             </a:r>
+            <a:endParaRPr lang="en-US" smtClean="0"/>
           </a:p>
           <a:p>
             <a:pPr lvl="1"/>
@@ -775,6 +779,7 @@
               <a:rPr lang="en-US" smtClean="0"/>
               <a:t>Second level</a:t>
             </a:r>
+            <a:endParaRPr lang="en-US" smtClean="0"/>
           </a:p>
           <a:p>
             <a:pPr lvl="2"/>
@@ -782,6 +787,7 @@
               <a:rPr lang="en-US" smtClean="0"/>
               <a:t>Third level</a:t>
             </a:r>
+            <a:endParaRPr lang="en-US" smtClean="0"/>
           </a:p>
           <a:p>
             <a:pPr lvl="3"/>
@@ -789,6 +795,7 @@
               <a:rPr lang="en-US" smtClean="0"/>
               <a:t>Fourth level</a:t>
             </a:r>
+            <a:endParaRPr lang="en-US" smtClean="0"/>
           </a:p>
           <a:p>
             <a:pPr lvl="4"/>
@@ -817,7 +824,6 @@
           <a:p>
             <a:fld id="{5BCAD085-E8A6-8845-BD4E-CB4CCA059FC4}" type="datetimeFigureOut">
               <a:rPr lang="en-US" smtClean="0"/>
-              <a:t>1/27/13</a:t>
             </a:fld>
             <a:endParaRPr lang="en-US"/>
           </a:p>
@@ -859,18 +865,12 @@
           <a:p>
             <a:fld id="{C1FF6DA9-008F-8B48-92A6-B652298478BF}" type="slidenum">
               <a:rPr lang="en-US" smtClean="0"/>
-              <a:t>‹#›</a:t>
             </a:fld>
             <a:endParaRPr lang="en-US"/>
           </a:p>
         </p:txBody>
       </p:sp>
     </p:spTree>
-    <p:extLst>
-      <p:ext uri="{BB962C8B-B14F-4D97-AF65-F5344CB8AC3E}">
-        <p14:creationId xmlns:p14="http://schemas.microsoft.com/office/powerpoint/2010/main" val="2614314258"/>
-      </p:ext>
-    </p:extLst>
   </p:cSld>
   <p:clrMapOvr>
     <a:masterClrMapping/>
@@ -1043,6 +1043,7 @@
               <a:rPr lang="en-US" smtClean="0"/>
               <a:t>Click to edit Master text styles</a:t>
             </a:r>
+            <a:endParaRPr lang="en-US" smtClean="0"/>
           </a:p>
         </p:txBody>
       </p:sp>
@@ -1063,7 +1064,6 @@
           <a:p>
             <a:fld id="{5BCAD085-E8A6-8845-BD4E-CB4CCA059FC4}" type="datetimeFigureOut">
               <a:rPr lang="en-US" smtClean="0"/>
-              <a:t>1/27/13</a:t>
             </a:fld>
             <a:endParaRPr lang="en-US"/>
           </a:p>
@@ -1105,18 +1105,12 @@
           <a:p>
             <a:fld id="{C1FF6DA9-008F-8B48-92A6-B652298478BF}" type="slidenum">
               <a:rPr lang="en-US" smtClean="0"/>
-              <a:t>‹#›</a:t>
             </a:fld>
             <a:endParaRPr lang="en-US"/>
           </a:p>
         </p:txBody>
       </p:sp>
     </p:spTree>
-    <p:extLst>
-      <p:ext uri="{BB962C8B-B14F-4D97-AF65-F5344CB8AC3E}">
-        <p14:creationId xmlns:p14="http://schemas.microsoft.com/office/powerpoint/2010/main" val="960648375"/>
-      </p:ext>
-    </p:extLst>
   </p:cSld>
   <p:clrMapOvr>
     <a:masterClrMapping/>
@@ -1217,6 +1211,7 @@
               <a:rPr lang="en-US" smtClean="0"/>
               <a:t>Click to edit Master text styles</a:t>
             </a:r>
+            <a:endParaRPr lang="en-US" smtClean="0"/>
           </a:p>
           <a:p>
             <a:pPr lvl="1"/>
@@ -1224,6 +1219,7 @@
               <a:rPr lang="en-US" smtClean="0"/>
               <a:t>Second level</a:t>
             </a:r>
+            <a:endParaRPr lang="en-US" smtClean="0"/>
           </a:p>
           <a:p>
             <a:pPr lvl="2"/>
@@ -1231,6 +1227,7 @@
               <a:rPr lang="en-US" smtClean="0"/>
               <a:t>Third level</a:t>
             </a:r>
+            <a:endParaRPr lang="en-US" smtClean="0"/>
           </a:p>
           <a:p>
             <a:pPr lvl="3"/>
@@ -1238,6 +1235,7 @@
               <a:rPr lang="en-US" smtClean="0"/>
               <a:t>Fourth level</a:t>
             </a:r>
+            <a:endParaRPr lang="en-US" smtClean="0"/>
           </a:p>
           <a:p>
             <a:pPr lvl="4"/>
@@ -1302,6 +1300,7 @@
               <a:rPr lang="en-US" smtClean="0"/>
               <a:t>Click to edit Master text styles</a:t>
             </a:r>
+            <a:endParaRPr lang="en-US" smtClean="0"/>
           </a:p>
           <a:p>
             <a:pPr lvl="1"/>
@@ -1309,6 +1308,7 @@
               <a:rPr lang="en-US" smtClean="0"/>
               <a:t>Second level</a:t>
             </a:r>
+            <a:endParaRPr lang="en-US" smtClean="0"/>
           </a:p>
           <a:p>
             <a:pPr lvl="2"/>
@@ -1316,6 +1316,7 @@
               <a:rPr lang="en-US" smtClean="0"/>
               <a:t>Third level</a:t>
             </a:r>
+            <a:endParaRPr lang="en-US" smtClean="0"/>
           </a:p>
           <a:p>
             <a:pPr lvl="3"/>
@@ -1323,6 +1324,7 @@
               <a:rPr lang="en-US" smtClean="0"/>
               <a:t>Fourth level</a:t>
             </a:r>
+            <a:endParaRPr lang="en-US" smtClean="0"/>
           </a:p>
           <a:p>
             <a:pPr lvl="4"/>
@@ -1351,7 +1353,6 @@
           <a:p>
             <a:fld id="{5BCAD085-E8A6-8845-BD4E-CB4CCA059FC4}" type="datetimeFigureOut">
               <a:rPr lang="en-US" smtClean="0"/>
-              <a:t>1/27/13</a:t>
             </a:fld>
             <a:endParaRPr lang="en-US"/>
           </a:p>
@@ -1393,18 +1394,12 @@
           <a:p>
             <a:fld id="{C1FF6DA9-008F-8B48-92A6-B652298478BF}" type="slidenum">
               <a:rPr lang="en-US" smtClean="0"/>
-              <a:t>‹#›</a:t>
             </a:fld>
             <a:endParaRPr lang="en-US"/>
           </a:p>
         </p:txBody>
       </p:sp>
     </p:spTree>
-    <p:extLst>
-      <p:ext uri="{BB962C8B-B14F-4D97-AF65-F5344CB8AC3E}">
-        <p14:creationId xmlns:p14="http://schemas.microsoft.com/office/powerpoint/2010/main" val="2782244947"/>
-      </p:ext>
-    </p:extLst>
   </p:cSld>
   <p:clrMapOvr>
     <a:masterClrMapping/>
@@ -1518,6 +1513,7 @@
               <a:rPr lang="en-US" smtClean="0"/>
               <a:t>Click to edit Master text styles</a:t>
             </a:r>
+            <a:endParaRPr lang="en-US" smtClean="0"/>
           </a:p>
         </p:txBody>
       </p:sp>
@@ -1574,6 +1570,7 @@
               <a:rPr lang="en-US" smtClean="0"/>
               <a:t>Click to edit Master text styles</a:t>
             </a:r>
+            <a:endParaRPr lang="en-US" smtClean="0"/>
           </a:p>
           <a:p>
             <a:pPr lvl="1"/>
@@ -1581,6 +1578,7 @@
               <a:rPr lang="en-US" smtClean="0"/>
               <a:t>Second level</a:t>
             </a:r>
+            <a:endParaRPr lang="en-US" smtClean="0"/>
           </a:p>
           <a:p>
             <a:pPr lvl="2"/>
@@ -1588,6 +1586,7 @@
               <a:rPr lang="en-US" smtClean="0"/>
               <a:t>Third level</a:t>
             </a:r>
+            <a:endParaRPr lang="en-US" smtClean="0"/>
           </a:p>
           <a:p>
             <a:pPr lvl="3"/>
@@ -1595,6 +1594,7 @@
               <a:rPr lang="en-US" smtClean="0"/>
               <a:t>Fourth level</a:t>
             </a:r>
+            <a:endParaRPr lang="en-US" smtClean="0"/>
           </a:p>
           <a:p>
             <a:pPr lvl="4"/>
@@ -1668,6 +1668,7 @@
               <a:rPr lang="en-US" smtClean="0"/>
               <a:t>Click to edit Master text styles</a:t>
             </a:r>
+            <a:endParaRPr lang="en-US" smtClean="0"/>
           </a:p>
         </p:txBody>
       </p:sp>
@@ -1724,6 +1725,7 @@
               <a:rPr lang="en-US" smtClean="0"/>
               <a:t>Click to edit Master text styles</a:t>
             </a:r>
+            <a:endParaRPr lang="en-US" smtClean="0"/>
           </a:p>
           <a:p>
             <a:pPr lvl="1"/>
@@ -1731,6 +1733,7 @@
               <a:rPr lang="en-US" smtClean="0"/>
               <a:t>Second level</a:t>
             </a:r>
+            <a:endParaRPr lang="en-US" smtClean="0"/>
           </a:p>
           <a:p>
             <a:pPr lvl="2"/>
@@ -1738,6 +1741,7 @@
               <a:rPr lang="en-US" smtClean="0"/>
               <a:t>Third level</a:t>
             </a:r>
+            <a:endParaRPr lang="en-US" smtClean="0"/>
           </a:p>
           <a:p>
             <a:pPr lvl="3"/>
@@ -1745,6 +1749,7 @@
               <a:rPr lang="en-US" smtClean="0"/>
               <a:t>Fourth level</a:t>
             </a:r>
+            <a:endParaRPr lang="en-US" smtClean="0"/>
           </a:p>
           <a:p>
             <a:pPr lvl="4"/>
@@ -1773,7 +1778,6 @@
           <a:p>
             <a:fld id="{5BCAD085-E8A6-8845-BD4E-CB4CCA059FC4}" type="datetimeFigureOut">
               <a:rPr lang="en-US" smtClean="0"/>
-              <a:t>1/27/13</a:t>
             </a:fld>
             <a:endParaRPr lang="en-US"/>
           </a:p>
@@ -1815,18 +1819,12 @@
           <a:p>
             <a:fld id="{C1FF6DA9-008F-8B48-92A6-B652298478BF}" type="slidenum">
               <a:rPr lang="en-US" smtClean="0"/>
-              <a:t>‹#›</a:t>
             </a:fld>
             <a:endParaRPr lang="en-US"/>
           </a:p>
         </p:txBody>
       </p:sp>
     </p:spTree>
-    <p:extLst>
-      <p:ext uri="{BB962C8B-B14F-4D97-AF65-F5344CB8AC3E}">
-        <p14:creationId xmlns:p14="http://schemas.microsoft.com/office/powerpoint/2010/main" val="990158736"/>
-      </p:ext>
-    </p:extLst>
   </p:cSld>
   <p:clrMapOvr>
     <a:masterClrMapping/>
@@ -1891,7 +1889,6 @@
           <a:p>
             <a:fld id="{5BCAD085-E8A6-8845-BD4E-CB4CCA059FC4}" type="datetimeFigureOut">
               <a:rPr lang="en-US" smtClean="0"/>
-              <a:t>1/27/13</a:t>
             </a:fld>
             <a:endParaRPr lang="en-US"/>
           </a:p>
@@ -1933,18 +1930,12 @@
           <a:p>
             <a:fld id="{C1FF6DA9-008F-8B48-92A6-B652298478BF}" type="slidenum">
               <a:rPr lang="en-US" smtClean="0"/>
-              <a:t>‹#›</a:t>
             </a:fld>
             <a:endParaRPr lang="en-US"/>
           </a:p>
         </p:txBody>
       </p:sp>
     </p:spTree>
-    <p:extLst>
-      <p:ext uri="{BB962C8B-B14F-4D97-AF65-F5344CB8AC3E}">
-        <p14:creationId xmlns:p14="http://schemas.microsoft.com/office/powerpoint/2010/main" val="727027711"/>
-      </p:ext>
-    </p:extLst>
   </p:cSld>
   <p:clrMapOvr>
     <a:masterClrMapping/>
@@ -1986,7 +1977,6 @@
           <a:p>
             <a:fld id="{5BCAD085-E8A6-8845-BD4E-CB4CCA059FC4}" type="datetimeFigureOut">
               <a:rPr lang="en-US" smtClean="0"/>
-              <a:t>1/27/13</a:t>
             </a:fld>
             <a:endParaRPr lang="en-US"/>
           </a:p>
@@ -2028,18 +2018,12 @@
           <a:p>
             <a:fld id="{C1FF6DA9-008F-8B48-92A6-B652298478BF}" type="slidenum">
               <a:rPr lang="en-US" smtClean="0"/>
-              <a:t>‹#›</a:t>
             </a:fld>
             <a:endParaRPr lang="en-US"/>
           </a:p>
         </p:txBody>
       </p:sp>
     </p:spTree>
-    <p:extLst>
-      <p:ext uri="{BB962C8B-B14F-4D97-AF65-F5344CB8AC3E}">
-        <p14:creationId xmlns:p14="http://schemas.microsoft.com/office/powerpoint/2010/main" val="1212999818"/>
-      </p:ext>
-    </p:extLst>
   </p:cSld>
   <p:clrMapOvr>
     <a:masterClrMapping/>
@@ -2149,6 +2133,7 @@
               <a:rPr lang="en-US" smtClean="0"/>
               <a:t>Click to edit Master text styles</a:t>
             </a:r>
+            <a:endParaRPr lang="en-US" smtClean="0"/>
           </a:p>
           <a:p>
             <a:pPr lvl="1"/>
@@ -2156,6 +2141,7 @@
               <a:rPr lang="en-US" smtClean="0"/>
               <a:t>Second level</a:t>
             </a:r>
+            <a:endParaRPr lang="en-US" smtClean="0"/>
           </a:p>
           <a:p>
             <a:pPr lvl="2"/>
@@ -2163,6 +2149,7 @@
               <a:rPr lang="en-US" smtClean="0"/>
               <a:t>Third level</a:t>
             </a:r>
+            <a:endParaRPr lang="en-US" smtClean="0"/>
           </a:p>
           <a:p>
             <a:pPr lvl="3"/>
@@ -2170,6 +2157,7 @@
               <a:rPr lang="en-US" smtClean="0"/>
               <a:t>Fourth level</a:t>
             </a:r>
+            <a:endParaRPr lang="en-US" smtClean="0"/>
           </a:p>
           <a:p>
             <a:pPr lvl="4"/>
@@ -2243,6 +2231,7 @@
               <a:rPr lang="en-US" smtClean="0"/>
               <a:t>Click to edit Master text styles</a:t>
             </a:r>
+            <a:endParaRPr lang="en-US" smtClean="0"/>
           </a:p>
         </p:txBody>
       </p:sp>
@@ -2263,7 +2252,6 @@
           <a:p>
             <a:fld id="{5BCAD085-E8A6-8845-BD4E-CB4CCA059FC4}" type="datetimeFigureOut">
               <a:rPr lang="en-US" smtClean="0"/>
-              <a:t>1/27/13</a:t>
             </a:fld>
             <a:endParaRPr lang="en-US"/>
           </a:p>
@@ -2305,18 +2293,12 @@
           <a:p>
             <a:fld id="{C1FF6DA9-008F-8B48-92A6-B652298478BF}" type="slidenum">
               <a:rPr lang="en-US" smtClean="0"/>
-              <a:t>‹#›</a:t>
             </a:fld>
             <a:endParaRPr lang="en-US"/>
           </a:p>
         </p:txBody>
       </p:sp>
     </p:spTree>
-    <p:extLst>
-      <p:ext uri="{BB962C8B-B14F-4D97-AF65-F5344CB8AC3E}">
-        <p14:creationId xmlns:p14="http://schemas.microsoft.com/office/powerpoint/2010/main" val="1840726560"/>
-      </p:ext>
-    </p:extLst>
   </p:cSld>
   <p:clrMapOvr>
     <a:masterClrMapping/>
@@ -2496,6 +2478,7 @@
               <a:rPr lang="en-US" smtClean="0"/>
               <a:t>Click to edit Master text styles</a:t>
             </a:r>
+            <a:endParaRPr lang="en-US" smtClean="0"/>
           </a:p>
         </p:txBody>
       </p:sp>
@@ -2516,7 +2499,6 @@
           <a:p>
             <a:fld id="{5BCAD085-E8A6-8845-BD4E-CB4CCA059FC4}" type="datetimeFigureOut">
               <a:rPr lang="en-US" smtClean="0"/>
-              <a:t>1/27/13</a:t>
             </a:fld>
             <a:endParaRPr lang="en-US"/>
           </a:p>
@@ -2558,18 +2540,12 @@
           <a:p>
             <a:fld id="{C1FF6DA9-008F-8B48-92A6-B652298478BF}" type="slidenum">
               <a:rPr lang="en-US" smtClean="0"/>
-              <a:t>‹#›</a:t>
             </a:fld>
             <a:endParaRPr lang="en-US"/>
           </a:p>
         </p:txBody>
       </p:sp>
     </p:spTree>
-    <p:extLst>
-      <p:ext uri="{BB962C8B-B14F-4D97-AF65-F5344CB8AC3E}">
-        <p14:creationId xmlns:p14="http://schemas.microsoft.com/office/powerpoint/2010/main" val="3889236939"/>
-      </p:ext>
-    </p:extLst>
   </p:cSld>
   <p:clrMapOvr>
     <a:masterClrMapping/>
@@ -2662,6 +2638,7 @@
               <a:rPr lang="en-US" smtClean="0"/>
               <a:t>Click to edit Master text styles</a:t>
             </a:r>
+            <a:endParaRPr lang="en-US" smtClean="0"/>
           </a:p>
           <a:p>
             <a:pPr lvl="1"/>
@@ -2669,6 +2646,7 @@
               <a:rPr lang="en-US" smtClean="0"/>
               <a:t>Second level</a:t>
             </a:r>
+            <a:endParaRPr lang="en-US" smtClean="0"/>
           </a:p>
           <a:p>
             <a:pPr lvl="2"/>
@@ -2676,6 +2654,7 @@
               <a:rPr lang="en-US" smtClean="0"/>
               <a:t>Third level</a:t>
             </a:r>
+            <a:endParaRPr lang="en-US" smtClean="0"/>
           </a:p>
           <a:p>
             <a:pPr lvl="3"/>
@@ -2683,6 +2662,7 @@
               <a:rPr lang="en-US" smtClean="0"/>
               <a:t>Fourth level</a:t>
             </a:r>
+            <a:endParaRPr lang="en-US" smtClean="0"/>
           </a:p>
           <a:p>
             <a:pPr lvl="4"/>
@@ -2729,7 +2709,6 @@
           <a:p>
             <a:fld id="{5BCAD085-E8A6-8845-BD4E-CB4CCA059FC4}" type="datetimeFigureOut">
               <a:rPr lang="en-US" smtClean="0"/>
-              <a:t>1/27/13</a:t>
             </a:fld>
             <a:endParaRPr lang="en-US"/>
           </a:p>
@@ -2807,18 +2786,12 @@
           <a:p>
             <a:fld id="{C1FF6DA9-008F-8B48-92A6-B652298478BF}" type="slidenum">
               <a:rPr lang="en-US" smtClean="0"/>
-              <a:t>‹#›</a:t>
             </a:fld>
             <a:endParaRPr lang="en-US"/>
           </a:p>
         </p:txBody>
       </p:sp>
     </p:spTree>
-    <p:extLst>
-      <p:ext uri="{BB962C8B-B14F-4D97-AF65-F5344CB8AC3E}">
-        <p14:creationId xmlns:p14="http://schemas.microsoft.com/office/powerpoint/2010/main" val="2209977519"/>
-      </p:ext>
-    </p:extLst>
   </p:cSld>
   <p:clrMap bg1="lt1" tx1="dk1" bg2="lt2" tx2="dk2" accent1="accent1" accent2="accent2" accent3="accent3" accent4="accent4" accent5="accent5" accent6="accent6" hlink="hlink" folHlink="folHlink"/>
   <p:sldLayoutIdLst>
@@ -2856,7 +2829,7 @@
         <a:spcBef>
           <a:spcPct val="20000"/>
         </a:spcBef>
-        <a:buFont typeface="Arial"/>
+        <a:buFont typeface="Arial" panose="020B0604020202020204"/>
         <a:buChar char="•"/>
         <a:defRPr sz="3200" kern="1200">
           <a:solidFill>
@@ -2871,7 +2844,7 @@
         <a:spcBef>
           <a:spcPct val="20000"/>
         </a:spcBef>
-        <a:buFont typeface="Arial"/>
+        <a:buFont typeface="Arial" panose="020B0604020202020204"/>
         <a:buChar char="–"/>
         <a:defRPr sz="2800" kern="1200">
           <a:solidFill>
@@ -2886,7 +2859,7 @@
         <a:spcBef>
           <a:spcPct val="20000"/>
         </a:spcBef>
-        <a:buFont typeface="Arial"/>
+        <a:buFont typeface="Arial" panose="020B0604020202020204"/>
         <a:buChar char="•"/>
         <a:defRPr sz="2400" kern="1200">
           <a:solidFill>
@@ -2901,7 +2874,7 @@
         <a:spcBef>
           <a:spcPct val="20000"/>
         </a:spcBef>
-        <a:buFont typeface="Arial"/>
+        <a:buFont typeface="Arial" panose="020B0604020202020204"/>
         <a:buChar char="–"/>
         <a:defRPr sz="2000" kern="1200">
           <a:solidFill>
@@ -2916,7 +2889,7 @@
         <a:spcBef>
           <a:spcPct val="20000"/>
         </a:spcBef>
-        <a:buFont typeface="Arial"/>
+        <a:buFont typeface="Arial" panose="020B0604020202020204"/>
         <a:buChar char="»"/>
         <a:defRPr sz="2000" kern="1200">
           <a:solidFill>
@@ -2931,7 +2904,7 @@
         <a:spcBef>
           <a:spcPct val="20000"/>
         </a:spcBef>
-        <a:buFont typeface="Arial"/>
+        <a:buFont typeface="Arial" panose="020B0604020202020204"/>
         <a:buChar char="•"/>
         <a:defRPr sz="2000" kern="1200">
           <a:solidFill>
@@ -2946,7 +2919,7 @@
         <a:spcBef>
           <a:spcPct val="20000"/>
         </a:spcBef>
-        <a:buFont typeface="Arial"/>
+        <a:buFont typeface="Arial" panose="020B0604020202020204"/>
         <a:buChar char="•"/>
         <a:defRPr sz="2000" kern="1200">
           <a:solidFill>
@@ -2961,7 +2934,7 @@
         <a:spcBef>
           <a:spcPct val="20000"/>
         </a:spcBef>
-        <a:buFont typeface="Arial"/>
+        <a:buFont typeface="Arial" panose="020B0604020202020204"/>
         <a:buChar char="•"/>
         <a:defRPr sz="2000" kern="1200">
           <a:solidFill>
@@ -2976,7 +2949,7 @@
         <a:spcBef>
           <a:spcPct val="20000"/>
         </a:spcBef>
-        <a:buFont typeface="Arial"/>
+        <a:buFont typeface="Arial" panose="020B0604020202020204"/>
         <a:buChar char="•"/>
         <a:defRPr sz="2000" kern="1200">
           <a:solidFill>
@@ -3088,7 +3061,7 @@
 </file>
 
 <file path=ppt/slides/slide1.xml><?xml version="1.0" encoding="utf-8"?>
-<p:sld xmlns:a="http://schemas.openxmlformats.org/drawingml/2006/main" xmlns:p="http://schemas.openxmlformats.org/presentationml/2006/main" xmlns:r="http://schemas.openxmlformats.org/officeDocument/2006/relationships">
+<p:sld xmlns:a="http://schemas.openxmlformats.org/drawingml/2006/main" xmlns:r="http://schemas.openxmlformats.org/officeDocument/2006/relationships" xmlns:p="http://schemas.openxmlformats.org/presentationml/2006/main">
   <p:cSld>
     <p:spTree>
       <p:nvGrpSpPr>
@@ -3750,7 +3723,7 @@
                 <a:solidFill>
                   <a:srgbClr val="3ADCFF"/>
                 </a:solidFill>
-                <a:latin typeface="Microsoft YaHei"/>
+                <a:latin typeface="微软雅黑" panose="020B0503020204020204" charset="-122"/>
               </a:defRPr>
             </a:pPr>
             <a:r>
@@ -3786,7 +3759,7 @@
                 <a:solidFill>
                   <a:srgbClr val="F8FAFF"/>
                 </a:solidFill>
-                <a:latin typeface="Microsoft YaHei"/>
+                <a:latin typeface="微软雅黑" panose="020B0503020204020204" charset="-122"/>
               </a:defRPr>
             </a:pPr>
             <a:r>
@@ -3822,7 +3795,7 @@
                 <a:solidFill>
                   <a:srgbClr val="AEBEE1"/>
                 </a:solidFill>
-                <a:latin typeface="Microsoft YaHei"/>
+                <a:latin typeface="微软雅黑" panose="020B0503020204020204" charset="-122"/>
               </a:defRPr>
             </a:pPr>
             <a:r>
@@ -3903,7 +3876,7 @@
                 <a:solidFill>
                   <a:srgbClr val="F8FAFF"/>
                 </a:solidFill>
-                <a:latin typeface="Microsoft YaHei"/>
+                <a:latin typeface="微软雅黑" panose="020B0503020204020204" charset="-122"/>
               </a:defRPr>
             </a:pPr>
             <a:r>
@@ -3984,7 +3957,7 @@
                 <a:solidFill>
                   <a:srgbClr val="F8FAFF"/>
                 </a:solidFill>
-                <a:latin typeface="Microsoft YaHei"/>
+                <a:latin typeface="微软雅黑" panose="020B0503020204020204" charset="-122"/>
               </a:defRPr>
             </a:pPr>
             <a:r>
@@ -4065,7 +4038,7 @@
                 <a:solidFill>
                   <a:srgbClr val="F8FAFF"/>
                 </a:solidFill>
-                <a:latin typeface="Microsoft YaHei"/>
+                <a:latin typeface="微软雅黑" panose="020B0503020204020204" charset="-122"/>
               </a:defRPr>
             </a:pPr>
             <a:r>
@@ -4146,7 +4119,7 @@
                 <a:solidFill>
                   <a:srgbClr val="F8FAFF"/>
                 </a:solidFill>
-                <a:latin typeface="Microsoft YaHei"/>
+                <a:latin typeface="微软雅黑" panose="020B0503020204020204" charset="-122"/>
               </a:defRPr>
             </a:pPr>
             <a:r>
@@ -4182,7 +4155,7 @@
                 <a:solidFill>
                   <a:srgbClr val="96A6D2"/>
                 </a:solidFill>
-                <a:latin typeface="Microsoft YaHei"/>
+                <a:latin typeface="微软雅黑" panose="020B0503020204020204" charset="-122"/>
               </a:defRPr>
             </a:pPr>
             <a:r>
@@ -4218,7 +4191,7 @@
                 <a:solidFill>
                   <a:srgbClr val="8296C3"/>
                 </a:solidFill>
-                <a:latin typeface="Microsoft YaHei"/>
+                <a:latin typeface="微软雅黑" panose="020B0503020204020204" charset="-122"/>
               </a:defRPr>
             </a:pPr>
             <a:r>
@@ -4254,7 +4227,7 @@
                 <a:solidFill>
                   <a:srgbClr val="3ADCFF"/>
                 </a:solidFill>
-                <a:latin typeface="Microsoft YaHei"/>
+                <a:latin typeface="微软雅黑" panose="020B0503020204020204" charset="-122"/>
               </a:defRPr>
             </a:pPr>
             <a:r>
@@ -4272,7 +4245,7 @@
 </file>
 
 <file path=ppt/slides/slide10.xml><?xml version="1.0" encoding="utf-8"?>
-<p:sld xmlns:a="http://schemas.openxmlformats.org/drawingml/2006/main" xmlns:p="http://schemas.openxmlformats.org/presentationml/2006/main" xmlns:r="http://schemas.openxmlformats.org/officeDocument/2006/relationships">
+<p:sld xmlns:a="http://schemas.openxmlformats.org/drawingml/2006/main" xmlns:r="http://schemas.openxmlformats.org/officeDocument/2006/relationships" xmlns:p="http://schemas.openxmlformats.org/presentationml/2006/main">
   <p:cSld>
     <p:spTree>
       <p:nvGrpSpPr>
@@ -4760,7 +4733,7 @@
                 <a:solidFill>
                   <a:srgbClr val="F8FAFF"/>
                 </a:solidFill>
-                <a:latin typeface="Microsoft YaHei"/>
+                <a:latin typeface="微软雅黑" panose="020B0503020204020204" charset="-122"/>
               </a:defRPr>
             </a:pPr>
             <a:r>
@@ -4796,7 +4769,7 @@
                 <a:solidFill>
                   <a:srgbClr val="AEBEE1"/>
                 </a:solidFill>
-                <a:latin typeface="Microsoft YaHei"/>
+                <a:latin typeface="微软雅黑" panose="020B0503020204020204" charset="-122"/>
               </a:defRPr>
             </a:pPr>
             <a:r>
@@ -4877,7 +4850,7 @@
                 <a:solidFill>
                   <a:srgbClr val="F8FAFF"/>
                 </a:solidFill>
-                <a:latin typeface="Microsoft YaHei"/>
+                <a:latin typeface="微软雅黑" panose="020B0503020204020204" charset="-122"/>
               </a:defRPr>
             </a:pPr>
             <a:r>
@@ -4958,7 +4931,7 @@
                 <a:solidFill>
                   <a:srgbClr val="F8FAFF"/>
                 </a:solidFill>
-                <a:latin typeface="Microsoft YaHei"/>
+                <a:latin typeface="微软雅黑" panose="020B0503020204020204" charset="-122"/>
               </a:defRPr>
             </a:pPr>
             <a:r>
@@ -5039,7 +5012,7 @@
                 <a:solidFill>
                   <a:srgbClr val="F8FAFF"/>
                 </a:solidFill>
-                <a:latin typeface="Microsoft YaHei"/>
+                <a:latin typeface="微软雅黑" panose="020B0503020204020204" charset="-122"/>
               </a:defRPr>
             </a:pPr>
             <a:r>
@@ -5120,7 +5093,7 @@
                 <a:solidFill>
                   <a:srgbClr val="F8FAFF"/>
                 </a:solidFill>
-                <a:latin typeface="Microsoft YaHei"/>
+                <a:latin typeface="微软雅黑" panose="020B0503020204020204" charset="-122"/>
               </a:defRPr>
             </a:pPr>
             <a:r>
@@ -5201,7 +5174,7 @@
                 <a:solidFill>
                   <a:srgbClr val="F8FAFF"/>
                 </a:solidFill>
-                <a:latin typeface="Microsoft YaHei"/>
+                <a:latin typeface="微软雅黑" panose="020B0503020204020204" charset="-122"/>
               </a:defRPr>
             </a:pPr>
             <a:r>
@@ -5282,7 +5255,7 @@
                 <a:solidFill>
                   <a:srgbClr val="F8FAFF"/>
                 </a:solidFill>
-                <a:latin typeface="Microsoft YaHei"/>
+                <a:latin typeface="微软雅黑" panose="020B0503020204020204" charset="-122"/>
               </a:defRPr>
             </a:pPr>
             <a:r>
@@ -5318,7 +5291,7 @@
                 <a:solidFill>
                   <a:srgbClr val="3ADCFF"/>
                 </a:solidFill>
-                <a:latin typeface="Microsoft YaHei"/>
+                <a:latin typeface="微软雅黑" panose="020B0503020204020204" charset="-122"/>
               </a:defRPr>
             </a:pPr>
             <a:r>
@@ -5354,7 +5327,7 @@
                 <a:solidFill>
                   <a:srgbClr val="8296C3"/>
                 </a:solidFill>
-                <a:latin typeface="Microsoft YaHei"/>
+                <a:latin typeface="微软雅黑" panose="020B0503020204020204" charset="-122"/>
               </a:defRPr>
             </a:pPr>
             <a:r>
@@ -5390,11 +5363,11 @@
                 <a:solidFill>
                   <a:srgbClr val="3ADCFF"/>
                 </a:solidFill>
-                <a:latin typeface="Microsoft YaHei"/>
-              </a:defRPr>
-            </a:pPr>
-            <a:r>
-              <a:t>10</a:t>
+                <a:latin typeface="微软雅黑" panose="020B0503020204020204" charset="-122"/>
+              </a:defRPr>
+            </a:pPr>
+            <a:r>
+              <a:t>11</a:t>
             </a:r>
           </a:p>
         </p:txBody>
@@ -5408,7 +5381,7 @@
 </file>
 
 <file path=ppt/slides/slide2.xml><?xml version="1.0" encoding="utf-8"?>
-<p:sld xmlns:a="http://schemas.openxmlformats.org/drawingml/2006/main" xmlns:p="http://schemas.openxmlformats.org/presentationml/2006/main" xmlns:r="http://schemas.openxmlformats.org/officeDocument/2006/relationships">
+<p:sld xmlns:a="http://schemas.openxmlformats.org/drawingml/2006/main" xmlns:r="http://schemas.openxmlformats.org/officeDocument/2006/relationships" xmlns:p="http://schemas.openxmlformats.org/presentationml/2006/main">
   <p:cSld>
     <p:spTree>
       <p:nvGrpSpPr>
@@ -5896,7 +5869,7 @@
                 <a:solidFill>
                   <a:srgbClr val="F8FAFF"/>
                 </a:solidFill>
-                <a:latin typeface="Microsoft YaHei"/>
+                <a:latin typeface="微软雅黑" panose="020B0503020204020204" charset="-122"/>
               </a:defRPr>
             </a:pPr>
             <a:r>
@@ -5932,7 +5905,7 @@
                 <a:solidFill>
                   <a:srgbClr val="AEBEE1"/>
                 </a:solidFill>
-                <a:latin typeface="Microsoft YaHei"/>
+                <a:latin typeface="微软雅黑" panose="020B0503020204020204" charset="-122"/>
               </a:defRPr>
             </a:pPr>
             <a:r>
@@ -6011,7 +5984,7 @@
                 <a:solidFill>
                   <a:srgbClr val="8296C3"/>
                 </a:solidFill>
-                <a:latin typeface="Microsoft YaHei"/>
+                <a:latin typeface="微软雅黑" panose="020B0503020204020204" charset="-122"/>
               </a:defRPr>
             </a:pPr>
             <a:r>
@@ -6047,7 +6020,7 @@
                 <a:solidFill>
                   <a:srgbClr val="3ADCFF"/>
                 </a:solidFill>
-                <a:latin typeface="Microsoft YaHei"/>
+                <a:latin typeface="微软雅黑" panose="020B0503020204020204" charset="-122"/>
               </a:defRPr>
             </a:pPr>
             <a:r>
@@ -6083,7 +6056,7 @@
                 <a:solidFill>
                   <a:srgbClr val="3ADCFF"/>
                 </a:solidFill>
-                <a:latin typeface="Microsoft YaHei"/>
+                <a:latin typeface="微软雅黑" panose="020B0503020204020204" charset="-122"/>
               </a:defRPr>
             </a:pPr>
             <a:r>
@@ -6119,7 +6092,7 @@
                 <a:solidFill>
                   <a:srgbClr val="F8FAFF"/>
                 </a:solidFill>
-                <a:latin typeface="Microsoft YaHei"/>
+                <a:latin typeface="微软雅黑" panose="020B0503020204020204" charset="-122"/>
               </a:defRPr>
             </a:pPr>
             <a:r>
@@ -6190,7 +6163,7 @@
                 <a:solidFill>
                   <a:srgbClr val="3ADCFF"/>
                 </a:solidFill>
-                <a:latin typeface="Microsoft YaHei"/>
+                <a:latin typeface="微软雅黑" panose="020B0503020204020204" charset="-122"/>
               </a:defRPr>
             </a:pPr>
             <a:r>
@@ -6226,7 +6199,7 @@
                 <a:solidFill>
                   <a:srgbClr val="F8FAFF"/>
                 </a:solidFill>
-                <a:latin typeface="Microsoft YaHei"/>
+                <a:latin typeface="微软雅黑" panose="020B0503020204020204" charset="-122"/>
               </a:defRPr>
             </a:pPr>
             <a:r>
@@ -6297,7 +6270,7 @@
                 <a:solidFill>
                   <a:srgbClr val="3ADCFF"/>
                 </a:solidFill>
-                <a:latin typeface="Microsoft YaHei"/>
+                <a:latin typeface="微软雅黑" panose="020B0503020204020204" charset="-122"/>
               </a:defRPr>
             </a:pPr>
             <a:r>
@@ -6333,7 +6306,7 @@
                 <a:solidFill>
                   <a:srgbClr val="F8FAFF"/>
                 </a:solidFill>
-                <a:latin typeface="Microsoft YaHei"/>
+                <a:latin typeface="微软雅黑" panose="020B0503020204020204" charset="-122"/>
               </a:defRPr>
             </a:pPr>
             <a:r>
@@ -6404,7 +6377,7 @@
                 <a:solidFill>
                   <a:srgbClr val="3ADCFF"/>
                 </a:solidFill>
-                <a:latin typeface="Microsoft YaHei"/>
+                <a:latin typeface="微软雅黑" panose="020B0503020204020204" charset="-122"/>
               </a:defRPr>
             </a:pPr>
             <a:r>
@@ -6440,7 +6413,7 @@
                 <a:solidFill>
                   <a:srgbClr val="F8FAFF"/>
                 </a:solidFill>
-                <a:latin typeface="Microsoft YaHei"/>
+                <a:latin typeface="微软雅黑" panose="020B0503020204020204" charset="-122"/>
               </a:defRPr>
             </a:pPr>
             <a:r>
@@ -6511,7 +6484,7 @@
                 <a:solidFill>
                   <a:srgbClr val="3ADCFF"/>
                 </a:solidFill>
-                <a:latin typeface="Microsoft YaHei"/>
+                <a:latin typeface="微软雅黑" panose="020B0503020204020204" charset="-122"/>
               </a:defRPr>
             </a:pPr>
             <a:r>
@@ -6547,7 +6520,7 @@
                 <a:solidFill>
                   <a:srgbClr val="F8FAFF"/>
                 </a:solidFill>
-                <a:latin typeface="Microsoft YaHei"/>
+                <a:latin typeface="微软雅黑" panose="020B0503020204020204" charset="-122"/>
               </a:defRPr>
             </a:pPr>
             <a:r>
@@ -6618,7 +6591,7 @@
                 <a:solidFill>
                   <a:srgbClr val="3ADCFF"/>
                 </a:solidFill>
-                <a:latin typeface="Microsoft YaHei"/>
+                <a:latin typeface="微软雅黑" panose="020B0503020204020204" charset="-122"/>
               </a:defRPr>
             </a:pPr>
             <a:r>
@@ -6654,7 +6627,7 @@
                 <a:solidFill>
                   <a:srgbClr val="F8FAFF"/>
                 </a:solidFill>
-                <a:latin typeface="Microsoft YaHei"/>
+                <a:latin typeface="微软雅黑" panose="020B0503020204020204" charset="-122"/>
               </a:defRPr>
             </a:pPr>
             <a:r>
@@ -6707,7 +6680,7 @@
 </file>
 
 <file path=ppt/slides/slide3.xml><?xml version="1.0" encoding="utf-8"?>
-<p:sld xmlns:a="http://schemas.openxmlformats.org/drawingml/2006/main" xmlns:p="http://schemas.openxmlformats.org/presentationml/2006/main" xmlns:r="http://schemas.openxmlformats.org/officeDocument/2006/relationships">
+<p:sld xmlns:a="http://schemas.openxmlformats.org/drawingml/2006/main" xmlns:r="http://schemas.openxmlformats.org/officeDocument/2006/relationships" xmlns:p="http://schemas.openxmlformats.org/presentationml/2006/main">
   <p:cSld>
     <p:spTree>
       <p:nvGrpSpPr>
@@ -7195,7 +7168,7 @@
                 <a:solidFill>
                   <a:srgbClr val="F8FAFF"/>
                 </a:solidFill>
-                <a:latin typeface="Microsoft YaHei"/>
+                <a:latin typeface="微软雅黑" panose="020B0503020204020204" charset="-122"/>
               </a:defRPr>
             </a:pPr>
             <a:r>
@@ -7231,7 +7204,7 @@
                 <a:solidFill>
                   <a:srgbClr val="AEBEE1"/>
                 </a:solidFill>
-                <a:latin typeface="Microsoft YaHei"/>
+                <a:latin typeface="微软雅黑" panose="020B0503020204020204" charset="-122"/>
               </a:defRPr>
             </a:pPr>
             <a:r>
@@ -7310,7 +7283,7 @@
                 <a:solidFill>
                   <a:srgbClr val="8296C3"/>
                 </a:solidFill>
-                <a:latin typeface="Microsoft YaHei"/>
+                <a:latin typeface="微软雅黑" panose="020B0503020204020204" charset="-122"/>
               </a:defRPr>
             </a:pPr>
             <a:r>
@@ -7346,7 +7319,7 @@
                 <a:solidFill>
                   <a:srgbClr val="3ADCFF"/>
                 </a:solidFill>
-                <a:latin typeface="Microsoft YaHei"/>
+                <a:latin typeface="微软雅黑" panose="020B0503020204020204" charset="-122"/>
               </a:defRPr>
             </a:pPr>
             <a:r>
@@ -7470,7 +7443,7 @@
                 <a:solidFill>
                   <a:srgbClr val="F8FAFF"/>
                 </a:solidFill>
-                <a:latin typeface="Microsoft YaHei"/>
+                <a:latin typeface="微软雅黑" panose="020B0503020204020204" charset="-122"/>
               </a:defRPr>
             </a:pPr>
             <a:r>
@@ -7505,11 +7478,11 @@
               <a:spcAft>
                 <a:spcPts val="300"/>
               </a:spcAft>
-              <a:defRPr sz="1019">
+              <a:defRPr sz="1020">
                 <a:solidFill>
                   <a:srgbClr val="AEBEE1"/>
                 </a:solidFill>
-                <a:latin typeface="Microsoft YaHei"/>
+                <a:latin typeface="微软雅黑" panose="020B0503020204020204" charset="-122"/>
               </a:defRPr>
             </a:pPr>
             <a:r>
@@ -7521,11 +7494,11 @@
               <a:spcAft>
                 <a:spcPts val="300"/>
               </a:spcAft>
-              <a:defRPr sz="1019">
+              <a:defRPr sz="1020">
                 <a:solidFill>
                   <a:srgbClr val="AEBEE1"/>
                 </a:solidFill>
-                <a:latin typeface="Microsoft YaHei"/>
+                <a:latin typeface="微软雅黑" panose="020B0503020204020204" charset="-122"/>
               </a:defRPr>
             </a:pPr>
             <a:r>
@@ -7649,7 +7622,7 @@
                 <a:solidFill>
                   <a:srgbClr val="F8FAFF"/>
                 </a:solidFill>
-                <a:latin typeface="Microsoft YaHei"/>
+                <a:latin typeface="微软雅黑" panose="020B0503020204020204" charset="-122"/>
               </a:defRPr>
             </a:pPr>
             <a:r>
@@ -7684,11 +7657,11 @@
               <a:spcAft>
                 <a:spcPts val="300"/>
               </a:spcAft>
-              <a:defRPr sz="1019">
+              <a:defRPr sz="1020">
                 <a:solidFill>
                   <a:srgbClr val="AEBEE1"/>
                 </a:solidFill>
-                <a:latin typeface="Microsoft YaHei"/>
+                <a:latin typeface="微软雅黑" panose="020B0503020204020204" charset="-122"/>
               </a:defRPr>
             </a:pPr>
             <a:r>
@@ -7700,11 +7673,11 @@
               <a:spcAft>
                 <a:spcPts val="300"/>
               </a:spcAft>
-              <a:defRPr sz="1019">
+              <a:defRPr sz="1020">
                 <a:solidFill>
                   <a:srgbClr val="AEBEE1"/>
                 </a:solidFill>
-                <a:latin typeface="Microsoft YaHei"/>
+                <a:latin typeface="微软雅黑" panose="020B0503020204020204" charset="-122"/>
               </a:defRPr>
             </a:pPr>
             <a:r>
@@ -7828,7 +7801,7 @@
                 <a:solidFill>
                   <a:srgbClr val="F8FAFF"/>
                 </a:solidFill>
-                <a:latin typeface="Microsoft YaHei"/>
+                <a:latin typeface="微软雅黑" panose="020B0503020204020204" charset="-122"/>
               </a:defRPr>
             </a:pPr>
             <a:r>
@@ -7863,11 +7836,11 @@
               <a:spcAft>
                 <a:spcPts val="300"/>
               </a:spcAft>
-              <a:defRPr sz="1019">
+              <a:defRPr sz="1020">
                 <a:solidFill>
                   <a:srgbClr val="AEBEE1"/>
                 </a:solidFill>
-                <a:latin typeface="Microsoft YaHei"/>
+                <a:latin typeface="微软雅黑" panose="020B0503020204020204" charset="-122"/>
               </a:defRPr>
             </a:pPr>
             <a:r>
@@ -7879,11 +7852,11 @@
               <a:spcAft>
                 <a:spcPts val="300"/>
               </a:spcAft>
-              <a:defRPr sz="1019">
+              <a:defRPr sz="1020">
                 <a:solidFill>
                   <a:srgbClr val="AEBEE1"/>
                 </a:solidFill>
-                <a:latin typeface="Microsoft YaHei"/>
+                <a:latin typeface="微软雅黑" panose="020B0503020204020204" charset="-122"/>
               </a:defRPr>
             </a:pPr>
             <a:r>
@@ -7919,7 +7892,7 @@
                 <a:solidFill>
                   <a:srgbClr val="F8FAFF"/>
                 </a:solidFill>
-                <a:latin typeface="Microsoft YaHei"/>
+                <a:latin typeface="微软雅黑" panose="020B0503020204020204" charset="-122"/>
               </a:defRPr>
             </a:pPr>
             <a:r>
@@ -8043,7 +8016,7 @@
                 <a:solidFill>
                   <a:srgbClr val="F8FAFF"/>
                 </a:solidFill>
-                <a:latin typeface="Microsoft YaHei"/>
+                <a:latin typeface="微软雅黑" panose="020B0503020204020204" charset="-122"/>
               </a:defRPr>
             </a:pPr>
             <a:r>
@@ -8078,11 +8051,11 @@
               <a:spcAft>
                 <a:spcPts val="300"/>
               </a:spcAft>
-              <a:defRPr sz="1019">
+              <a:defRPr sz="1020">
                 <a:solidFill>
                   <a:srgbClr val="AEBEE1"/>
                 </a:solidFill>
-                <a:latin typeface="Microsoft YaHei"/>
+                <a:latin typeface="微软雅黑" panose="020B0503020204020204" charset="-122"/>
               </a:defRPr>
             </a:pPr>
             <a:r>
@@ -8206,7 +8179,7 @@
                 <a:solidFill>
                   <a:srgbClr val="F8FAFF"/>
                 </a:solidFill>
-                <a:latin typeface="Microsoft YaHei"/>
+                <a:latin typeface="微软雅黑" panose="020B0503020204020204" charset="-122"/>
               </a:defRPr>
             </a:pPr>
             <a:r>
@@ -8241,11 +8214,11 @@
               <a:spcAft>
                 <a:spcPts val="300"/>
               </a:spcAft>
-              <a:defRPr sz="1019">
+              <a:defRPr sz="1020">
                 <a:solidFill>
                   <a:srgbClr val="AEBEE1"/>
                 </a:solidFill>
-                <a:latin typeface="Microsoft YaHei"/>
+                <a:latin typeface="微软雅黑" panose="020B0503020204020204" charset="-122"/>
               </a:defRPr>
             </a:pPr>
             <a:r>
@@ -8369,7 +8342,7 @@
                 <a:solidFill>
                   <a:srgbClr val="F8FAFF"/>
                 </a:solidFill>
-                <a:latin typeface="Microsoft YaHei"/>
+                <a:latin typeface="微软雅黑" panose="020B0503020204020204" charset="-122"/>
               </a:defRPr>
             </a:pPr>
             <a:r>
@@ -8404,11 +8377,11 @@
               <a:spcAft>
                 <a:spcPts val="300"/>
               </a:spcAft>
-              <a:defRPr sz="1019">
+              <a:defRPr sz="1020">
                 <a:solidFill>
                   <a:srgbClr val="AEBEE1"/>
                 </a:solidFill>
-                <a:latin typeface="Microsoft YaHei"/>
+                <a:latin typeface="微软雅黑" panose="020B0503020204020204" charset="-122"/>
               </a:defRPr>
             </a:pPr>
             <a:r>
@@ -8532,7 +8505,7 @@
                 <a:solidFill>
                   <a:srgbClr val="F8FAFF"/>
                 </a:solidFill>
-                <a:latin typeface="Microsoft YaHei"/>
+                <a:latin typeface="微软雅黑" panose="020B0503020204020204" charset="-122"/>
               </a:defRPr>
             </a:pPr>
             <a:r>
@@ -8567,11 +8540,11 @@
               <a:spcAft>
                 <a:spcPts val="300"/>
               </a:spcAft>
-              <a:defRPr sz="1019">
+              <a:defRPr sz="1020">
                 <a:solidFill>
                   <a:srgbClr val="AEBEE1"/>
                 </a:solidFill>
-                <a:latin typeface="Microsoft YaHei"/>
+                <a:latin typeface="微软雅黑" panose="020B0503020204020204" charset="-122"/>
               </a:defRPr>
             </a:pPr>
             <a:r>
@@ -8589,7 +8562,7 @@
 </file>
 
 <file path=ppt/slides/slide4.xml><?xml version="1.0" encoding="utf-8"?>
-<p:sld xmlns:a="http://schemas.openxmlformats.org/drawingml/2006/main" xmlns:p="http://schemas.openxmlformats.org/presentationml/2006/main" xmlns:r="http://schemas.openxmlformats.org/officeDocument/2006/relationships">
+<p:sld xmlns:a="http://schemas.openxmlformats.org/drawingml/2006/main" xmlns:r="http://schemas.openxmlformats.org/officeDocument/2006/relationships" xmlns:p="http://schemas.openxmlformats.org/presentationml/2006/main">
   <p:cSld>
     <p:spTree>
       <p:nvGrpSpPr>
@@ -9077,7 +9050,7 @@
                 <a:solidFill>
                   <a:srgbClr val="F8FAFF"/>
                 </a:solidFill>
-                <a:latin typeface="Microsoft YaHei"/>
+                <a:latin typeface="微软雅黑" panose="020B0503020204020204" charset="-122"/>
               </a:defRPr>
             </a:pPr>
             <a:r>
@@ -9113,7 +9086,7 @@
                 <a:solidFill>
                   <a:srgbClr val="AEBEE1"/>
                 </a:solidFill>
-                <a:latin typeface="Microsoft YaHei"/>
+                <a:latin typeface="微软雅黑" panose="020B0503020204020204" charset="-122"/>
               </a:defRPr>
             </a:pPr>
             <a:r>
@@ -9192,7 +9165,7 @@
                 <a:solidFill>
                   <a:srgbClr val="8296C3"/>
                 </a:solidFill>
-                <a:latin typeface="Microsoft YaHei"/>
+                <a:latin typeface="微软雅黑" panose="020B0503020204020204" charset="-122"/>
               </a:defRPr>
             </a:pPr>
             <a:r>
@@ -9228,7 +9201,7 @@
                 <a:solidFill>
                   <a:srgbClr val="3ADCFF"/>
                 </a:solidFill>
-                <a:latin typeface="Microsoft YaHei"/>
+                <a:latin typeface="微软雅黑" panose="020B0503020204020204" charset="-122"/>
               </a:defRPr>
             </a:pPr>
             <a:r>
@@ -9352,7 +9325,7 @@
                 <a:solidFill>
                   <a:srgbClr val="F8FAFF"/>
                 </a:solidFill>
-                <a:latin typeface="Microsoft YaHei"/>
+                <a:latin typeface="微软雅黑" panose="020B0503020204020204" charset="-122"/>
               </a:defRPr>
             </a:pPr>
             <a:r>
@@ -9387,11 +9360,11 @@
               <a:spcAft>
                 <a:spcPts val="300"/>
               </a:spcAft>
-              <a:defRPr sz="1019">
+              <a:defRPr sz="1020">
                 <a:solidFill>
                   <a:srgbClr val="AEBEE1"/>
                 </a:solidFill>
-                <a:latin typeface="Microsoft YaHei"/>
+                <a:latin typeface="微软雅黑" panose="020B0503020204020204" charset="-122"/>
               </a:defRPr>
             </a:pPr>
             <a:r>
@@ -9515,7 +9488,7 @@
                 <a:solidFill>
                   <a:srgbClr val="F8FAFF"/>
                 </a:solidFill>
-                <a:latin typeface="Microsoft YaHei"/>
+                <a:latin typeface="微软雅黑" panose="020B0503020204020204" charset="-122"/>
               </a:defRPr>
             </a:pPr>
             <a:r>
@@ -9550,11 +9523,11 @@
               <a:spcAft>
                 <a:spcPts val="300"/>
               </a:spcAft>
-              <a:defRPr sz="1019">
+              <a:defRPr sz="1020">
                 <a:solidFill>
                   <a:srgbClr val="AEBEE1"/>
                 </a:solidFill>
-                <a:latin typeface="Microsoft YaHei"/>
+                <a:latin typeface="微软雅黑" panose="020B0503020204020204" charset="-122"/>
               </a:defRPr>
             </a:pPr>
             <a:r>
@@ -9678,7 +9651,7 @@
                 <a:solidFill>
                   <a:srgbClr val="F8FAFF"/>
                 </a:solidFill>
-                <a:latin typeface="Microsoft YaHei"/>
+                <a:latin typeface="微软雅黑" panose="020B0503020204020204" charset="-122"/>
               </a:defRPr>
             </a:pPr>
             <a:r>
@@ -9713,11 +9686,11 @@
               <a:spcAft>
                 <a:spcPts val="300"/>
               </a:spcAft>
-              <a:defRPr sz="1019">
+              <a:defRPr sz="1020">
                 <a:solidFill>
                   <a:srgbClr val="AEBEE1"/>
                 </a:solidFill>
-                <a:latin typeface="Microsoft YaHei"/>
+                <a:latin typeface="微软雅黑" panose="020B0503020204020204" charset="-122"/>
               </a:defRPr>
             </a:pPr>
             <a:r>
@@ -9841,7 +9814,7 @@
                 <a:solidFill>
                   <a:srgbClr val="F8FAFF"/>
                 </a:solidFill>
-                <a:latin typeface="Microsoft YaHei"/>
+                <a:latin typeface="微软雅黑" panose="020B0503020204020204" charset="-122"/>
               </a:defRPr>
             </a:pPr>
             <a:r>
@@ -9876,11 +9849,11 @@
               <a:spcAft>
                 <a:spcPts val="300"/>
               </a:spcAft>
-              <a:defRPr sz="1019">
+              <a:defRPr sz="1020">
                 <a:solidFill>
                   <a:srgbClr val="AEBEE1"/>
                 </a:solidFill>
-                <a:latin typeface="Microsoft YaHei"/>
+                <a:latin typeface="微软雅黑" panose="020B0503020204020204" charset="-122"/>
               </a:defRPr>
             </a:pPr>
             <a:r>
@@ -9961,7 +9934,7 @@
                 <a:solidFill>
                   <a:srgbClr val="3ADCFF"/>
                 </a:solidFill>
-                <a:latin typeface="Microsoft YaHei"/>
+                <a:latin typeface="微软雅黑" panose="020B0503020204020204" charset="-122"/>
               </a:defRPr>
             </a:pPr>
             <a:r>
@@ -9997,7 +9970,7 @@
                 <a:solidFill>
                   <a:srgbClr val="AEBEE1"/>
                 </a:solidFill>
-                <a:latin typeface="Microsoft YaHei"/>
+                <a:latin typeface="微软雅黑" panose="020B0503020204020204" charset="-122"/>
               </a:defRPr>
             </a:pPr>
             <a:r>
@@ -10078,7 +10051,7 @@
                 <a:solidFill>
                   <a:srgbClr val="4CE6AA"/>
                 </a:solidFill>
-                <a:latin typeface="Microsoft YaHei"/>
+                <a:latin typeface="微软雅黑" panose="020B0503020204020204" charset="-122"/>
               </a:defRPr>
             </a:pPr>
             <a:r>
@@ -10114,7 +10087,7 @@
                 <a:solidFill>
                   <a:srgbClr val="AEBEE1"/>
                 </a:solidFill>
-                <a:latin typeface="Microsoft YaHei"/>
+                <a:latin typeface="微软雅黑" panose="020B0503020204020204" charset="-122"/>
               </a:defRPr>
             </a:pPr>
             <a:r>
@@ -10195,7 +10168,7 @@
                 <a:solidFill>
                   <a:srgbClr val="9B5CFF"/>
                 </a:solidFill>
-                <a:latin typeface="Microsoft YaHei"/>
+                <a:latin typeface="微软雅黑" panose="020B0503020204020204" charset="-122"/>
               </a:defRPr>
             </a:pPr>
             <a:r>
@@ -10231,7 +10204,7 @@
                 <a:solidFill>
                   <a:srgbClr val="AEBEE1"/>
                 </a:solidFill>
-                <a:latin typeface="Microsoft YaHei"/>
+                <a:latin typeface="微软雅黑" panose="020B0503020204020204" charset="-122"/>
               </a:defRPr>
             </a:pPr>
             <a:r>
@@ -10312,7 +10285,7 @@
                 <a:solidFill>
                   <a:srgbClr val="FFB45A"/>
                 </a:solidFill>
-                <a:latin typeface="Microsoft YaHei"/>
+                <a:latin typeface="微软雅黑" panose="020B0503020204020204" charset="-122"/>
               </a:defRPr>
             </a:pPr>
             <a:r>
@@ -10348,7 +10321,7 @@
                 <a:solidFill>
                   <a:srgbClr val="AEBEE1"/>
                 </a:solidFill>
-                <a:latin typeface="Microsoft YaHei"/>
+                <a:latin typeface="微软雅黑" panose="020B0503020204020204" charset="-122"/>
               </a:defRPr>
             </a:pPr>
             <a:r>
@@ -10472,7 +10445,7 @@
                 <a:solidFill>
                   <a:srgbClr val="F8FAFF"/>
                 </a:solidFill>
-                <a:latin typeface="Microsoft YaHei"/>
+                <a:latin typeface="微软雅黑" panose="020B0503020204020204" charset="-122"/>
               </a:defRPr>
             </a:pPr>
             <a:r>
@@ -10507,11 +10480,11 @@
               <a:spcAft>
                 <a:spcPts val="300"/>
               </a:spcAft>
-              <a:defRPr sz="1019">
+              <a:defRPr sz="1020">
                 <a:solidFill>
                   <a:srgbClr val="AEBEE1"/>
                 </a:solidFill>
-                <a:latin typeface="Microsoft YaHei"/>
+                <a:latin typeface="微软雅黑" panose="020B0503020204020204" charset="-122"/>
               </a:defRPr>
             </a:pPr>
             <a:r>
@@ -10523,11 +10496,11 @@
               <a:spcAft>
                 <a:spcPts val="300"/>
               </a:spcAft>
-              <a:defRPr sz="1019">
+              <a:defRPr sz="1020">
                 <a:solidFill>
                   <a:srgbClr val="AEBEE1"/>
                 </a:solidFill>
-                <a:latin typeface="Microsoft YaHei"/>
+                <a:latin typeface="微软雅黑" panose="020B0503020204020204" charset="-122"/>
               </a:defRPr>
             </a:pPr>
             <a:r>
@@ -10539,11 +10512,11 @@
               <a:spcAft>
                 <a:spcPts val="300"/>
               </a:spcAft>
-              <a:defRPr sz="1019">
+              <a:defRPr sz="1020">
                 <a:solidFill>
                   <a:srgbClr val="AEBEE1"/>
                 </a:solidFill>
-                <a:latin typeface="Microsoft YaHei"/>
+                <a:latin typeface="微软雅黑" panose="020B0503020204020204" charset="-122"/>
               </a:defRPr>
             </a:pPr>
             <a:r>
@@ -10667,7 +10640,7 @@
                 <a:solidFill>
                   <a:srgbClr val="F8FAFF"/>
                 </a:solidFill>
-                <a:latin typeface="Microsoft YaHei"/>
+                <a:latin typeface="微软雅黑" panose="020B0503020204020204" charset="-122"/>
               </a:defRPr>
             </a:pPr>
             <a:r>
@@ -10702,11 +10675,11 @@
               <a:spcAft>
                 <a:spcPts val="300"/>
               </a:spcAft>
-              <a:defRPr sz="1019">
+              <a:defRPr sz="1020">
                 <a:solidFill>
                   <a:srgbClr val="AEBEE1"/>
                 </a:solidFill>
-                <a:latin typeface="Microsoft YaHei"/>
+                <a:latin typeface="微软雅黑" panose="020B0503020204020204" charset="-122"/>
               </a:defRPr>
             </a:pPr>
             <a:r>
@@ -10718,11 +10691,11 @@
               <a:spcAft>
                 <a:spcPts val="300"/>
               </a:spcAft>
-              <a:defRPr sz="1019">
+              <a:defRPr sz="1020">
                 <a:solidFill>
                   <a:srgbClr val="AEBEE1"/>
                 </a:solidFill>
-                <a:latin typeface="Microsoft YaHei"/>
+                <a:latin typeface="微软雅黑" panose="020B0503020204020204" charset="-122"/>
               </a:defRPr>
             </a:pPr>
             <a:r>
@@ -10734,11 +10707,11 @@
               <a:spcAft>
                 <a:spcPts val="300"/>
               </a:spcAft>
-              <a:defRPr sz="1019">
+              <a:defRPr sz="1020">
                 <a:solidFill>
                   <a:srgbClr val="AEBEE1"/>
                 </a:solidFill>
-                <a:latin typeface="Microsoft YaHei"/>
+                <a:latin typeface="微软雅黑" panose="020B0503020204020204" charset="-122"/>
               </a:defRPr>
             </a:pPr>
             <a:r>
@@ -10862,7 +10835,7 @@
                 <a:solidFill>
                   <a:srgbClr val="F8FAFF"/>
                 </a:solidFill>
-                <a:latin typeface="Microsoft YaHei"/>
+                <a:latin typeface="微软雅黑" panose="020B0503020204020204" charset="-122"/>
               </a:defRPr>
             </a:pPr>
             <a:r>
@@ -10897,11 +10870,11 @@
               <a:spcAft>
                 <a:spcPts val="300"/>
               </a:spcAft>
-              <a:defRPr sz="1019">
+              <a:defRPr sz="1020">
                 <a:solidFill>
                   <a:srgbClr val="AEBEE1"/>
                 </a:solidFill>
-                <a:latin typeface="Microsoft YaHei"/>
+                <a:latin typeface="微软雅黑" panose="020B0503020204020204" charset="-122"/>
               </a:defRPr>
             </a:pPr>
             <a:r>
@@ -10913,11 +10886,11 @@
               <a:spcAft>
                 <a:spcPts val="300"/>
               </a:spcAft>
-              <a:defRPr sz="1019">
+              <a:defRPr sz="1020">
                 <a:solidFill>
                   <a:srgbClr val="AEBEE1"/>
                 </a:solidFill>
-                <a:latin typeface="Microsoft YaHei"/>
+                <a:latin typeface="微软雅黑" panose="020B0503020204020204" charset="-122"/>
               </a:defRPr>
             </a:pPr>
             <a:r>
@@ -10929,11 +10902,11 @@
               <a:spcAft>
                 <a:spcPts val="300"/>
               </a:spcAft>
-              <a:defRPr sz="1019">
+              <a:defRPr sz="1020">
                 <a:solidFill>
                   <a:srgbClr val="AEBEE1"/>
                 </a:solidFill>
-                <a:latin typeface="Microsoft YaHei"/>
+                <a:latin typeface="微软雅黑" panose="020B0503020204020204" charset="-122"/>
               </a:defRPr>
             </a:pPr>
             <a:r>
@@ -10951,7 +10924,7 @@
 </file>
 
 <file path=ppt/slides/slide5.xml><?xml version="1.0" encoding="utf-8"?>
-<p:sld xmlns:a="http://schemas.openxmlformats.org/drawingml/2006/main" xmlns:p="http://schemas.openxmlformats.org/presentationml/2006/main" xmlns:r="http://schemas.openxmlformats.org/officeDocument/2006/relationships">
+<p:sld xmlns:a="http://schemas.openxmlformats.org/drawingml/2006/main" xmlns:r="http://schemas.openxmlformats.org/officeDocument/2006/relationships" xmlns:p="http://schemas.openxmlformats.org/presentationml/2006/main">
   <p:cSld>
     <p:spTree>
       <p:nvGrpSpPr>
@@ -11439,7 +11412,7 @@
                 <a:solidFill>
                   <a:srgbClr val="F8FAFF"/>
                 </a:solidFill>
-                <a:latin typeface="Microsoft YaHei"/>
+                <a:latin typeface="微软雅黑" panose="020B0503020204020204" charset="-122"/>
               </a:defRPr>
             </a:pPr>
             <a:r>
@@ -11475,7 +11448,7 @@
                 <a:solidFill>
                   <a:srgbClr val="AEBEE1"/>
                 </a:solidFill>
-                <a:latin typeface="Microsoft YaHei"/>
+                <a:latin typeface="微软雅黑" panose="020B0503020204020204" charset="-122"/>
               </a:defRPr>
             </a:pPr>
             <a:r>
@@ -11554,7 +11527,7 @@
                 <a:solidFill>
                   <a:srgbClr val="8296C3"/>
                 </a:solidFill>
-                <a:latin typeface="Microsoft YaHei"/>
+                <a:latin typeface="微软雅黑" panose="020B0503020204020204" charset="-122"/>
               </a:defRPr>
             </a:pPr>
             <a:r>
@@ -11590,7 +11563,7 @@
                 <a:solidFill>
                   <a:srgbClr val="3ADCFF"/>
                 </a:solidFill>
-                <a:latin typeface="Microsoft YaHei"/>
+                <a:latin typeface="微软雅黑" panose="020B0503020204020204" charset="-122"/>
               </a:defRPr>
             </a:pPr>
             <a:r>
@@ -11714,7 +11687,7 @@
                 <a:solidFill>
                   <a:srgbClr val="F8FAFF"/>
                 </a:solidFill>
-                <a:latin typeface="Microsoft YaHei"/>
+                <a:latin typeface="微软雅黑" panose="020B0503020204020204" charset="-122"/>
               </a:defRPr>
             </a:pPr>
             <a:r>
@@ -11749,11 +11722,11 @@
               <a:spcAft>
                 <a:spcPts val="300"/>
               </a:spcAft>
-              <a:defRPr sz="1019">
+              <a:defRPr sz="1020">
                 <a:solidFill>
                   <a:srgbClr val="AEBEE1"/>
                 </a:solidFill>
-                <a:latin typeface="Microsoft YaHei"/>
+                <a:latin typeface="微软雅黑" panose="020B0503020204020204" charset="-122"/>
               </a:defRPr>
             </a:pPr>
             <a:r>
@@ -11765,11 +11738,11 @@
               <a:spcAft>
                 <a:spcPts val="300"/>
               </a:spcAft>
-              <a:defRPr sz="1019">
+              <a:defRPr sz="1020">
                 <a:solidFill>
                   <a:srgbClr val="AEBEE1"/>
                 </a:solidFill>
-                <a:latin typeface="Microsoft YaHei"/>
+                <a:latin typeface="微软雅黑" panose="020B0503020204020204" charset="-122"/>
               </a:defRPr>
             </a:pPr>
             <a:r>
@@ -11781,11 +11754,11 @@
               <a:spcAft>
                 <a:spcPts val="300"/>
               </a:spcAft>
-              <a:defRPr sz="1019">
+              <a:defRPr sz="1020">
                 <a:solidFill>
                   <a:srgbClr val="AEBEE1"/>
                 </a:solidFill>
-                <a:latin typeface="Microsoft YaHei"/>
+                <a:latin typeface="微软雅黑" panose="020B0503020204020204" charset="-122"/>
               </a:defRPr>
             </a:pPr>
             <a:r>
@@ -11797,11 +11770,11 @@
               <a:spcAft>
                 <a:spcPts val="300"/>
               </a:spcAft>
-              <a:defRPr sz="1019">
+              <a:defRPr sz="1020">
                 <a:solidFill>
                   <a:srgbClr val="AEBEE1"/>
                 </a:solidFill>
-                <a:latin typeface="Microsoft YaHei"/>
+                <a:latin typeface="微软雅黑" panose="020B0503020204020204" charset="-122"/>
               </a:defRPr>
             </a:pPr>
             <a:r>
@@ -11813,11 +11786,11 @@
               <a:spcAft>
                 <a:spcPts val="300"/>
               </a:spcAft>
-              <a:defRPr sz="1019">
+              <a:defRPr sz="1020">
                 <a:solidFill>
                   <a:srgbClr val="AEBEE1"/>
                 </a:solidFill>
-                <a:latin typeface="Microsoft YaHei"/>
+                <a:latin typeface="微软雅黑" panose="020B0503020204020204" charset="-122"/>
               </a:defRPr>
             </a:pPr>
             <a:r>
@@ -11941,7 +11914,7 @@
                 <a:solidFill>
                   <a:srgbClr val="F8FAFF"/>
                 </a:solidFill>
-                <a:latin typeface="Microsoft YaHei"/>
+                <a:latin typeface="微软雅黑" panose="020B0503020204020204" charset="-122"/>
               </a:defRPr>
             </a:pPr>
             <a:r>
@@ -11976,11 +11949,11 @@
               <a:spcAft>
                 <a:spcPts val="300"/>
               </a:spcAft>
-              <a:defRPr sz="1019">
+              <a:defRPr sz="1020">
                 <a:solidFill>
                   <a:srgbClr val="AEBEE1"/>
                 </a:solidFill>
-                <a:latin typeface="Microsoft YaHei"/>
+                <a:latin typeface="微软雅黑" panose="020B0503020204020204" charset="-122"/>
               </a:defRPr>
             </a:pPr>
             <a:r>
@@ -11992,11 +11965,11 @@
               <a:spcAft>
                 <a:spcPts val="300"/>
               </a:spcAft>
-              <a:defRPr sz="1019">
+              <a:defRPr sz="1020">
                 <a:solidFill>
                   <a:srgbClr val="AEBEE1"/>
                 </a:solidFill>
-                <a:latin typeface="Microsoft YaHei"/>
+                <a:latin typeface="微软雅黑" panose="020B0503020204020204" charset="-122"/>
               </a:defRPr>
             </a:pPr>
             <a:r>
@@ -12008,11 +11981,11 @@
               <a:spcAft>
                 <a:spcPts val="300"/>
               </a:spcAft>
-              <a:defRPr sz="1019">
+              <a:defRPr sz="1020">
                 <a:solidFill>
                   <a:srgbClr val="AEBEE1"/>
                 </a:solidFill>
-                <a:latin typeface="Microsoft YaHei"/>
+                <a:latin typeface="微软雅黑" panose="020B0503020204020204" charset="-122"/>
               </a:defRPr>
             </a:pPr>
             <a:r>
@@ -12024,11 +11997,11 @@
               <a:spcAft>
                 <a:spcPts val="300"/>
               </a:spcAft>
-              <a:defRPr sz="1019">
+              <a:defRPr sz="1020">
                 <a:solidFill>
                   <a:srgbClr val="AEBEE1"/>
                 </a:solidFill>
-                <a:latin typeface="Microsoft YaHei"/>
+                <a:latin typeface="微软雅黑" panose="020B0503020204020204" charset="-122"/>
               </a:defRPr>
             </a:pPr>
             <a:r>
@@ -12040,11 +12013,11 @@
               <a:spcAft>
                 <a:spcPts val="300"/>
               </a:spcAft>
-              <a:defRPr sz="1019">
+              <a:defRPr sz="1020">
                 <a:solidFill>
                   <a:srgbClr val="AEBEE1"/>
                 </a:solidFill>
-                <a:latin typeface="Microsoft YaHei"/>
+                <a:latin typeface="微软雅黑" panose="020B0503020204020204" charset="-122"/>
               </a:defRPr>
             </a:pPr>
             <a:r>
@@ -12168,7 +12141,7 @@
                 <a:solidFill>
                   <a:srgbClr val="F8FAFF"/>
                 </a:solidFill>
-                <a:latin typeface="Microsoft YaHei"/>
+                <a:latin typeface="微软雅黑" panose="020B0503020204020204" charset="-122"/>
               </a:defRPr>
             </a:pPr>
             <a:r>
@@ -12203,11 +12176,11 @@
               <a:spcAft>
                 <a:spcPts val="300"/>
               </a:spcAft>
-              <a:defRPr sz="1019">
+              <a:defRPr sz="1020">
                 <a:solidFill>
                   <a:srgbClr val="AEBEE1"/>
                 </a:solidFill>
-                <a:latin typeface="Microsoft YaHei"/>
+                <a:latin typeface="微软雅黑" panose="020B0503020204020204" charset="-122"/>
               </a:defRPr>
             </a:pPr>
             <a:r>
@@ -12219,11 +12192,11 @@
               <a:spcAft>
                 <a:spcPts val="300"/>
               </a:spcAft>
-              <a:defRPr sz="1019">
+              <a:defRPr sz="1020">
                 <a:solidFill>
                   <a:srgbClr val="AEBEE1"/>
                 </a:solidFill>
-                <a:latin typeface="Microsoft YaHei"/>
+                <a:latin typeface="微软雅黑" panose="020B0503020204020204" charset="-122"/>
               </a:defRPr>
             </a:pPr>
             <a:r>
@@ -12235,11 +12208,11 @@
               <a:spcAft>
                 <a:spcPts val="300"/>
               </a:spcAft>
-              <a:defRPr sz="1019">
+              <a:defRPr sz="1020">
                 <a:solidFill>
                   <a:srgbClr val="AEBEE1"/>
                 </a:solidFill>
-                <a:latin typeface="Microsoft YaHei"/>
+                <a:latin typeface="微软雅黑" panose="020B0503020204020204" charset="-122"/>
               </a:defRPr>
             </a:pPr>
             <a:r>
@@ -12251,11 +12224,11 @@
               <a:spcAft>
                 <a:spcPts val="300"/>
               </a:spcAft>
-              <a:defRPr sz="1019">
+              <a:defRPr sz="1020">
                 <a:solidFill>
                   <a:srgbClr val="AEBEE1"/>
                 </a:solidFill>
-                <a:latin typeface="Microsoft YaHei"/>
+                <a:latin typeface="微软雅黑" panose="020B0503020204020204" charset="-122"/>
               </a:defRPr>
             </a:pPr>
             <a:r>
@@ -12267,11 +12240,11 @@
               <a:spcAft>
                 <a:spcPts val="300"/>
               </a:spcAft>
-              <a:defRPr sz="1019">
+              <a:defRPr sz="1020">
                 <a:solidFill>
                   <a:srgbClr val="AEBEE1"/>
                 </a:solidFill>
-                <a:latin typeface="Microsoft YaHei"/>
+                <a:latin typeface="微软雅黑" panose="020B0503020204020204" charset="-122"/>
               </a:defRPr>
             </a:pPr>
             <a:r>
@@ -12395,7 +12368,7 @@
                 <a:solidFill>
                   <a:srgbClr val="F8FAFF"/>
                 </a:solidFill>
-                <a:latin typeface="Microsoft YaHei"/>
+                <a:latin typeface="微软雅黑" panose="020B0503020204020204" charset="-122"/>
               </a:defRPr>
             </a:pPr>
             <a:r>
@@ -12430,11 +12403,11 @@
               <a:spcAft>
                 <a:spcPts val="300"/>
               </a:spcAft>
-              <a:defRPr sz="1019">
+              <a:defRPr sz="1020">
                 <a:solidFill>
                   <a:srgbClr val="AEBEE1"/>
                 </a:solidFill>
-                <a:latin typeface="Microsoft YaHei"/>
+                <a:latin typeface="微软雅黑" panose="020B0503020204020204" charset="-122"/>
               </a:defRPr>
             </a:pPr>
             <a:r>
@@ -12446,11 +12419,11 @@
               <a:spcAft>
                 <a:spcPts val="300"/>
               </a:spcAft>
-              <a:defRPr sz="1019">
+              <a:defRPr sz="1020">
                 <a:solidFill>
                   <a:srgbClr val="AEBEE1"/>
                 </a:solidFill>
-                <a:latin typeface="Microsoft YaHei"/>
+                <a:latin typeface="微软雅黑" panose="020B0503020204020204" charset="-122"/>
               </a:defRPr>
             </a:pPr>
             <a:r>
@@ -12462,11 +12435,11 @@
               <a:spcAft>
                 <a:spcPts val="300"/>
               </a:spcAft>
-              <a:defRPr sz="1019">
+              <a:defRPr sz="1020">
                 <a:solidFill>
                   <a:srgbClr val="AEBEE1"/>
                 </a:solidFill>
-                <a:latin typeface="Microsoft YaHei"/>
+                <a:latin typeface="微软雅黑" panose="020B0503020204020204" charset="-122"/>
               </a:defRPr>
             </a:pPr>
             <a:r>
@@ -12478,11 +12451,11 @@
               <a:spcAft>
                 <a:spcPts val="300"/>
               </a:spcAft>
-              <a:defRPr sz="1019">
+              <a:defRPr sz="1020">
                 <a:solidFill>
                   <a:srgbClr val="AEBEE1"/>
                 </a:solidFill>
-                <a:latin typeface="Microsoft YaHei"/>
+                <a:latin typeface="微软雅黑" panose="020B0503020204020204" charset="-122"/>
               </a:defRPr>
             </a:pPr>
             <a:r>
@@ -12494,11 +12467,11 @@
               <a:spcAft>
                 <a:spcPts val="300"/>
               </a:spcAft>
-              <a:defRPr sz="1019">
+              <a:defRPr sz="1020">
                 <a:solidFill>
                   <a:srgbClr val="AEBEE1"/>
                 </a:solidFill>
-                <a:latin typeface="Microsoft YaHei"/>
+                <a:latin typeface="微软雅黑" panose="020B0503020204020204" charset="-122"/>
               </a:defRPr>
             </a:pPr>
             <a:r>
@@ -12534,7 +12507,7 @@
                 <a:solidFill>
                   <a:srgbClr val="F8FAFF"/>
                 </a:solidFill>
-                <a:latin typeface="Microsoft YaHei"/>
+                <a:latin typeface="微软雅黑" panose="020B0503020204020204" charset="-122"/>
               </a:defRPr>
             </a:pPr>
             <a:r>
@@ -12552,7 +12525,7 @@
 </file>
 
 <file path=ppt/slides/slide6.xml><?xml version="1.0" encoding="utf-8"?>
-<p:sld xmlns:a="http://schemas.openxmlformats.org/drawingml/2006/main" xmlns:p="http://schemas.openxmlformats.org/presentationml/2006/main" xmlns:r="http://schemas.openxmlformats.org/officeDocument/2006/relationships">
+<p:sld xmlns:a="http://schemas.openxmlformats.org/drawingml/2006/main" xmlns:r="http://schemas.openxmlformats.org/officeDocument/2006/relationships" xmlns:p="http://schemas.openxmlformats.org/presentationml/2006/main">
   <p:cSld>
     <p:spTree>
       <p:nvGrpSpPr>
@@ -13040,7 +13013,7 @@
                 <a:solidFill>
                   <a:srgbClr val="F8FAFF"/>
                 </a:solidFill>
-                <a:latin typeface="Microsoft YaHei"/>
+                <a:latin typeface="微软雅黑" panose="020B0503020204020204" charset="-122"/>
               </a:defRPr>
             </a:pPr>
             <a:r>
@@ -13076,7 +13049,7 @@
                 <a:solidFill>
                   <a:srgbClr val="AEBEE1"/>
                 </a:solidFill>
-                <a:latin typeface="Microsoft YaHei"/>
+                <a:latin typeface="微软雅黑" panose="020B0503020204020204" charset="-122"/>
               </a:defRPr>
             </a:pPr>
             <a:r>
@@ -13155,7 +13128,7 @@
                 <a:solidFill>
                   <a:srgbClr val="8296C3"/>
                 </a:solidFill>
-                <a:latin typeface="Microsoft YaHei"/>
+                <a:latin typeface="微软雅黑" panose="020B0503020204020204" charset="-122"/>
               </a:defRPr>
             </a:pPr>
             <a:r>
@@ -13191,7 +13164,7 @@
                 <a:solidFill>
                   <a:srgbClr val="3ADCFF"/>
                 </a:solidFill>
-                <a:latin typeface="Microsoft YaHei"/>
+                <a:latin typeface="微软雅黑" panose="020B0503020204020204" charset="-122"/>
               </a:defRPr>
             </a:pPr>
             <a:r>
@@ -13315,7 +13288,7 @@
                 <a:solidFill>
                   <a:srgbClr val="F8FAFF"/>
                 </a:solidFill>
-                <a:latin typeface="Microsoft YaHei"/>
+                <a:latin typeface="微软雅黑" panose="020B0503020204020204" charset="-122"/>
               </a:defRPr>
             </a:pPr>
             <a:r>
@@ -13350,11 +13323,11 @@
               <a:spcAft>
                 <a:spcPts val="300"/>
               </a:spcAft>
-              <a:defRPr sz="1019">
+              <a:defRPr sz="1020">
                 <a:solidFill>
                   <a:srgbClr val="AEBEE1"/>
                 </a:solidFill>
-                <a:latin typeface="Microsoft YaHei"/>
+                <a:latin typeface="微软雅黑" panose="020B0503020204020204" charset="-122"/>
               </a:defRPr>
             </a:pPr>
             <a:r>
@@ -13478,7 +13451,7 @@
                 <a:solidFill>
                   <a:srgbClr val="F8FAFF"/>
                 </a:solidFill>
-                <a:latin typeface="Microsoft YaHei"/>
+                <a:latin typeface="微软雅黑" panose="020B0503020204020204" charset="-122"/>
               </a:defRPr>
             </a:pPr>
             <a:r>
@@ -13513,11 +13486,11 @@
               <a:spcAft>
                 <a:spcPts val="300"/>
               </a:spcAft>
-              <a:defRPr sz="1019">
+              <a:defRPr sz="1020">
                 <a:solidFill>
                   <a:srgbClr val="AEBEE1"/>
                 </a:solidFill>
-                <a:latin typeface="Microsoft YaHei"/>
+                <a:latin typeface="微软雅黑" panose="020B0503020204020204" charset="-122"/>
               </a:defRPr>
             </a:pPr>
             <a:r>
@@ -13641,7 +13614,7 @@
                 <a:solidFill>
                   <a:srgbClr val="F8FAFF"/>
                 </a:solidFill>
-                <a:latin typeface="Microsoft YaHei"/>
+                <a:latin typeface="微软雅黑" panose="020B0503020204020204" charset="-122"/>
               </a:defRPr>
             </a:pPr>
             <a:r>
@@ -13676,11 +13649,11 @@
               <a:spcAft>
                 <a:spcPts val="300"/>
               </a:spcAft>
-              <a:defRPr sz="1019">
+              <a:defRPr sz="1020">
                 <a:solidFill>
                   <a:srgbClr val="AEBEE1"/>
                 </a:solidFill>
-                <a:latin typeface="Microsoft YaHei"/>
+                <a:latin typeface="微软雅黑" panose="020B0503020204020204" charset="-122"/>
               </a:defRPr>
             </a:pPr>
             <a:r>
@@ -13804,7 +13777,7 @@
                 <a:solidFill>
                   <a:srgbClr val="F8FAFF"/>
                 </a:solidFill>
-                <a:latin typeface="Microsoft YaHei"/>
+                <a:latin typeface="微软雅黑" panose="020B0503020204020204" charset="-122"/>
               </a:defRPr>
             </a:pPr>
             <a:r>
@@ -13839,11 +13812,11 @@
               <a:spcAft>
                 <a:spcPts val="300"/>
               </a:spcAft>
-              <a:defRPr sz="1019">
+              <a:defRPr sz="1020">
                 <a:solidFill>
                   <a:srgbClr val="AEBEE1"/>
                 </a:solidFill>
-                <a:latin typeface="Microsoft YaHei"/>
+                <a:latin typeface="微软雅黑" panose="020B0503020204020204" charset="-122"/>
               </a:defRPr>
             </a:pPr>
             <a:r>
@@ -13967,7 +13940,7 @@
                 <a:solidFill>
                   <a:srgbClr val="F8FAFF"/>
                 </a:solidFill>
-                <a:latin typeface="Microsoft YaHei"/>
+                <a:latin typeface="微软雅黑" panose="020B0503020204020204" charset="-122"/>
               </a:defRPr>
             </a:pPr>
             <a:r>
@@ -14002,11 +13975,11 @@
               <a:spcAft>
                 <a:spcPts val="300"/>
               </a:spcAft>
-              <a:defRPr sz="1019">
+              <a:defRPr sz="1020">
                 <a:solidFill>
                   <a:srgbClr val="AEBEE1"/>
                 </a:solidFill>
-                <a:latin typeface="Microsoft YaHei"/>
+                <a:latin typeface="微软雅黑" panose="020B0503020204020204" charset="-122"/>
               </a:defRPr>
             </a:pPr>
             <a:r>
@@ -14130,7 +14103,7 @@
                 <a:solidFill>
                   <a:srgbClr val="F8FAFF"/>
                 </a:solidFill>
-                <a:latin typeface="Microsoft YaHei"/>
+                <a:latin typeface="微软雅黑" panose="020B0503020204020204" charset="-122"/>
               </a:defRPr>
             </a:pPr>
             <a:r>
@@ -14165,11 +14138,11 @@
               <a:spcAft>
                 <a:spcPts val="300"/>
               </a:spcAft>
-              <a:defRPr sz="1019">
+              <a:defRPr sz="1020">
                 <a:solidFill>
                   <a:srgbClr val="AEBEE1"/>
                 </a:solidFill>
-                <a:latin typeface="Microsoft YaHei"/>
+                <a:latin typeface="微软雅黑" panose="020B0503020204020204" charset="-122"/>
               </a:defRPr>
             </a:pPr>
             <a:r>
@@ -14187,7 +14160,7 @@
 </file>
 
 <file path=ppt/slides/slide7.xml><?xml version="1.0" encoding="utf-8"?>
-<p:sld xmlns:a="http://schemas.openxmlformats.org/drawingml/2006/main" xmlns:p="http://schemas.openxmlformats.org/presentationml/2006/main" xmlns:r="http://schemas.openxmlformats.org/officeDocument/2006/relationships">
+<p:sld xmlns:a="http://schemas.openxmlformats.org/drawingml/2006/main" xmlns:r="http://schemas.openxmlformats.org/officeDocument/2006/relationships" xmlns:p="http://schemas.openxmlformats.org/presentationml/2006/main">
   <p:cSld>
     <p:spTree>
       <p:nvGrpSpPr>
@@ -14675,7 +14648,7 @@
                 <a:solidFill>
                   <a:srgbClr val="F8FAFF"/>
                 </a:solidFill>
-                <a:latin typeface="Microsoft YaHei"/>
+                <a:latin typeface="微软雅黑" panose="020B0503020204020204" charset="-122"/>
               </a:defRPr>
             </a:pPr>
             <a:r>
@@ -14711,7 +14684,7 @@
                 <a:solidFill>
                   <a:srgbClr val="AEBEE1"/>
                 </a:solidFill>
-                <a:latin typeface="Microsoft YaHei"/>
+                <a:latin typeface="微软雅黑" panose="020B0503020204020204" charset="-122"/>
               </a:defRPr>
             </a:pPr>
             <a:r>
@@ -14790,7 +14763,7 @@
                 <a:solidFill>
                   <a:srgbClr val="8296C3"/>
                 </a:solidFill>
-                <a:latin typeface="Microsoft YaHei"/>
+                <a:latin typeface="微软雅黑" panose="020B0503020204020204" charset="-122"/>
               </a:defRPr>
             </a:pPr>
             <a:r>
@@ -14826,11 +14799,11 @@
                 <a:solidFill>
                   <a:srgbClr val="3ADCFF"/>
                 </a:solidFill>
-                <a:latin typeface="Microsoft YaHei"/>
-              </a:defRPr>
-            </a:pPr>
-            <a:r>
-              <a:t>07</a:t>
+                <a:latin typeface="微软雅黑" panose="020B0503020204020204" charset="-122"/>
+              </a:defRPr>
+            </a:pPr>
+            <a:r>
+              <a:t>08</a:t>
             </a:r>
           </a:p>
         </p:txBody>
@@ -14950,7 +14923,7 @@
                 <a:solidFill>
                   <a:srgbClr val="F8FAFF"/>
                 </a:solidFill>
-                <a:latin typeface="Microsoft YaHei"/>
+                <a:latin typeface="微软雅黑" panose="020B0503020204020204" charset="-122"/>
               </a:defRPr>
             </a:pPr>
             <a:r>
@@ -14967,8 +14940,8 @@
         </p:nvSpPr>
         <p:spPr>
           <a:xfrm>
-            <a:off x="978408" y="2103120"/>
-            <a:ext cx="1719072" cy="-64008"/>
+            <a:off x="978408" y="2039112"/>
+            <a:ext cx="1719072" cy="64008"/>
           </a:xfrm>
           <a:prstGeom prst="rect">
             <a:avLst/>
@@ -14985,11 +14958,11 @@
               <a:spcAft>
                 <a:spcPts val="300"/>
               </a:spcAft>
-              <a:defRPr sz="1019">
+              <a:defRPr sz="1020">
                 <a:solidFill>
                   <a:srgbClr val="AEBEE1"/>
                 </a:solidFill>
-                <a:latin typeface="Microsoft YaHei"/>
+                <a:latin typeface="微软雅黑" panose="020B0503020204020204" charset="-122"/>
               </a:defRPr>
             </a:pPr>
           </a:p>
@@ -15022,7 +14995,7 @@
                 <a:solidFill>
                   <a:srgbClr val="AEBEE1"/>
                 </a:solidFill>
-                <a:latin typeface="Microsoft YaHei"/>
+                <a:latin typeface="微软雅黑" panose="020B0503020204020204" charset="-122"/>
               </a:defRPr>
             </a:pPr>
             <a:r>
@@ -15058,7 +15031,7 @@
                 <a:solidFill>
                   <a:srgbClr val="AEBEE1"/>
                 </a:solidFill>
-                <a:latin typeface="Microsoft YaHei"/>
+                <a:latin typeface="微软雅黑" panose="020B0503020204020204" charset="-122"/>
               </a:defRPr>
             </a:pPr>
             <a:r>
@@ -15182,7 +15155,7 @@
                 <a:solidFill>
                   <a:srgbClr val="F8FAFF"/>
                 </a:solidFill>
-                <a:latin typeface="Microsoft YaHei"/>
+                <a:latin typeface="微软雅黑" panose="020B0503020204020204" charset="-122"/>
               </a:defRPr>
             </a:pPr>
             <a:r>
@@ -15199,8 +15172,8 @@
         </p:nvSpPr>
         <p:spPr>
           <a:xfrm>
-            <a:off x="978408" y="2889504"/>
-            <a:ext cx="1719072" cy="-64008"/>
+            <a:off x="978408" y="2825496"/>
+            <a:ext cx="1719072" cy="64008"/>
           </a:xfrm>
           <a:prstGeom prst="rect">
             <a:avLst/>
@@ -15217,11 +15190,11 @@
               <a:spcAft>
                 <a:spcPts val="300"/>
               </a:spcAft>
-              <a:defRPr sz="1019">
+              <a:defRPr sz="1020">
                 <a:solidFill>
                   <a:srgbClr val="AEBEE1"/>
                 </a:solidFill>
-                <a:latin typeface="Microsoft YaHei"/>
+                <a:latin typeface="微软雅黑" panose="020B0503020204020204" charset="-122"/>
               </a:defRPr>
             </a:pPr>
           </a:p>
@@ -15254,7 +15227,7 @@
                 <a:solidFill>
                   <a:srgbClr val="AEBEE1"/>
                 </a:solidFill>
-                <a:latin typeface="Microsoft YaHei"/>
+                <a:latin typeface="微软雅黑" panose="020B0503020204020204" charset="-122"/>
               </a:defRPr>
             </a:pPr>
             <a:r>
@@ -15290,7 +15263,7 @@
                 <a:solidFill>
                   <a:srgbClr val="AEBEE1"/>
                 </a:solidFill>
-                <a:latin typeface="Microsoft YaHei"/>
+                <a:latin typeface="微软雅黑" panose="020B0503020204020204" charset="-122"/>
               </a:defRPr>
             </a:pPr>
             <a:r>
@@ -15414,7 +15387,7 @@
                 <a:solidFill>
                   <a:srgbClr val="F8FAFF"/>
                 </a:solidFill>
-                <a:latin typeface="Microsoft YaHei"/>
+                <a:latin typeface="微软雅黑" panose="020B0503020204020204" charset="-122"/>
               </a:defRPr>
             </a:pPr>
             <a:r>
@@ -15431,8 +15404,8 @@
         </p:nvSpPr>
         <p:spPr>
           <a:xfrm>
-            <a:off x="978408" y="3675887"/>
-            <a:ext cx="1719072" cy="-64008"/>
+            <a:off x="978408" y="3611879"/>
+            <a:ext cx="1719072" cy="64008"/>
           </a:xfrm>
           <a:prstGeom prst="rect">
             <a:avLst/>
@@ -15449,11 +15422,11 @@
               <a:spcAft>
                 <a:spcPts val="300"/>
               </a:spcAft>
-              <a:defRPr sz="1019">
+              <a:defRPr sz="1020">
                 <a:solidFill>
                   <a:srgbClr val="AEBEE1"/>
                 </a:solidFill>
-                <a:latin typeface="Microsoft YaHei"/>
+                <a:latin typeface="微软雅黑" panose="020B0503020204020204" charset="-122"/>
               </a:defRPr>
             </a:pPr>
           </a:p>
@@ -15486,7 +15459,7 @@
                 <a:solidFill>
                   <a:srgbClr val="AEBEE1"/>
                 </a:solidFill>
-                <a:latin typeface="Microsoft YaHei"/>
+                <a:latin typeface="微软雅黑" panose="020B0503020204020204" charset="-122"/>
               </a:defRPr>
             </a:pPr>
             <a:r>
@@ -15522,7 +15495,7 @@
                 <a:solidFill>
                   <a:srgbClr val="AEBEE1"/>
                 </a:solidFill>
-                <a:latin typeface="Microsoft YaHei"/>
+                <a:latin typeface="微软雅黑" panose="020B0503020204020204" charset="-122"/>
               </a:defRPr>
             </a:pPr>
             <a:r>
@@ -15646,7 +15619,7 @@
                 <a:solidFill>
                   <a:srgbClr val="F8FAFF"/>
                 </a:solidFill>
-                <a:latin typeface="Microsoft YaHei"/>
+                <a:latin typeface="微软雅黑" panose="020B0503020204020204" charset="-122"/>
               </a:defRPr>
             </a:pPr>
             <a:r>
@@ -15663,8 +15636,8 @@
         </p:nvSpPr>
         <p:spPr>
           <a:xfrm>
-            <a:off x="978408" y="4462272"/>
-            <a:ext cx="1719072" cy="-64008"/>
+            <a:off x="978408" y="4398264"/>
+            <a:ext cx="1719072" cy="64008"/>
           </a:xfrm>
           <a:prstGeom prst="rect">
             <a:avLst/>
@@ -15681,11 +15654,11 @@
               <a:spcAft>
                 <a:spcPts val="300"/>
               </a:spcAft>
-              <a:defRPr sz="1019">
+              <a:defRPr sz="1020">
                 <a:solidFill>
                   <a:srgbClr val="AEBEE1"/>
                 </a:solidFill>
-                <a:latin typeface="Microsoft YaHei"/>
+                <a:latin typeface="微软雅黑" panose="020B0503020204020204" charset="-122"/>
               </a:defRPr>
             </a:pPr>
           </a:p>
@@ -15718,7 +15691,7 @@
                 <a:solidFill>
                   <a:srgbClr val="AEBEE1"/>
                 </a:solidFill>
-                <a:latin typeface="Microsoft YaHei"/>
+                <a:latin typeface="微软雅黑" panose="020B0503020204020204" charset="-122"/>
               </a:defRPr>
             </a:pPr>
             <a:r>
@@ -15754,7 +15727,7 @@
                 <a:solidFill>
                   <a:srgbClr val="AEBEE1"/>
                 </a:solidFill>
-                <a:latin typeface="Microsoft YaHei"/>
+                <a:latin typeface="微软雅黑" panose="020B0503020204020204" charset="-122"/>
               </a:defRPr>
             </a:pPr>
             <a:r>
@@ -15878,7 +15851,7 @@
                 <a:solidFill>
                   <a:srgbClr val="F8FAFF"/>
                 </a:solidFill>
-                <a:latin typeface="Microsoft YaHei"/>
+                <a:latin typeface="微软雅黑" panose="020B0503020204020204" charset="-122"/>
               </a:defRPr>
             </a:pPr>
             <a:r>
@@ -15895,8 +15868,8 @@
         </p:nvSpPr>
         <p:spPr>
           <a:xfrm>
-            <a:off x="978408" y="5248655"/>
-            <a:ext cx="1719072" cy="-64008"/>
+            <a:off x="978408" y="5184647"/>
+            <a:ext cx="1719072" cy="64008"/>
           </a:xfrm>
           <a:prstGeom prst="rect">
             <a:avLst/>
@@ -15913,11 +15886,11 @@
               <a:spcAft>
                 <a:spcPts val="300"/>
               </a:spcAft>
-              <a:defRPr sz="1019">
+              <a:defRPr sz="1020">
                 <a:solidFill>
                   <a:srgbClr val="AEBEE1"/>
                 </a:solidFill>
-                <a:latin typeface="Microsoft YaHei"/>
+                <a:latin typeface="微软雅黑" panose="020B0503020204020204" charset="-122"/>
               </a:defRPr>
             </a:pPr>
           </a:p>
@@ -15950,7 +15923,7 @@
                 <a:solidFill>
                   <a:srgbClr val="AEBEE1"/>
                 </a:solidFill>
-                <a:latin typeface="Microsoft YaHei"/>
+                <a:latin typeface="微软雅黑" panose="020B0503020204020204" charset="-122"/>
               </a:defRPr>
             </a:pPr>
             <a:r>
@@ -15986,7 +15959,7 @@
                 <a:solidFill>
                   <a:srgbClr val="AEBEE1"/>
                 </a:solidFill>
-                <a:latin typeface="Microsoft YaHei"/>
+                <a:latin typeface="微软雅黑" panose="020B0503020204020204" charset="-122"/>
               </a:defRPr>
             </a:pPr>
             <a:r>
@@ -16110,7 +16083,7 @@
                 <a:solidFill>
                   <a:srgbClr val="F8FAFF"/>
                 </a:solidFill>
-                <a:latin typeface="Microsoft YaHei"/>
+                <a:latin typeface="微软雅黑" panose="020B0503020204020204" charset="-122"/>
               </a:defRPr>
             </a:pPr>
             <a:r>
@@ -16127,8 +16100,8 @@
         </p:nvSpPr>
         <p:spPr>
           <a:xfrm>
-            <a:off x="978408" y="6035040"/>
-            <a:ext cx="1719072" cy="-64008"/>
+            <a:off x="978408" y="5971032"/>
+            <a:ext cx="1719072" cy="64008"/>
           </a:xfrm>
           <a:prstGeom prst="rect">
             <a:avLst/>
@@ -16145,11 +16118,11 @@
               <a:spcAft>
                 <a:spcPts val="300"/>
               </a:spcAft>
-              <a:defRPr sz="1019">
+              <a:defRPr sz="1020">
                 <a:solidFill>
                   <a:srgbClr val="AEBEE1"/>
                 </a:solidFill>
-                <a:latin typeface="Microsoft YaHei"/>
+                <a:latin typeface="微软雅黑" panose="020B0503020204020204" charset="-122"/>
               </a:defRPr>
             </a:pPr>
           </a:p>
@@ -16182,7 +16155,7 @@
                 <a:solidFill>
                   <a:srgbClr val="AEBEE1"/>
                 </a:solidFill>
-                <a:latin typeface="Microsoft YaHei"/>
+                <a:latin typeface="微软雅黑" panose="020B0503020204020204" charset="-122"/>
               </a:defRPr>
             </a:pPr>
             <a:r>
@@ -16218,7 +16191,7 @@
                 <a:solidFill>
                   <a:srgbClr val="AEBEE1"/>
                 </a:solidFill>
-                <a:latin typeface="Microsoft YaHei"/>
+                <a:latin typeface="微软雅黑" panose="020B0503020204020204" charset="-122"/>
               </a:defRPr>
             </a:pPr>
             <a:r>
@@ -16236,7 +16209,7 @@
 </file>
 
 <file path=ppt/slides/slide8.xml><?xml version="1.0" encoding="utf-8"?>
-<p:sld xmlns:a="http://schemas.openxmlformats.org/drawingml/2006/main" xmlns:p="http://schemas.openxmlformats.org/presentationml/2006/main" xmlns:r="http://schemas.openxmlformats.org/officeDocument/2006/relationships">
+<p:sld xmlns:a="http://schemas.openxmlformats.org/drawingml/2006/main" xmlns:r="http://schemas.openxmlformats.org/officeDocument/2006/relationships" xmlns:p="http://schemas.openxmlformats.org/presentationml/2006/main">
   <p:cSld>
     <p:spTree>
       <p:nvGrpSpPr>
@@ -16724,7 +16697,7 @@
                 <a:solidFill>
                   <a:srgbClr val="F8FAFF"/>
                 </a:solidFill>
-                <a:latin typeface="Microsoft YaHei"/>
+                <a:latin typeface="微软雅黑" panose="020B0503020204020204" charset="-122"/>
               </a:defRPr>
             </a:pPr>
             <a:r>
@@ -16760,7 +16733,7 @@
                 <a:solidFill>
                   <a:srgbClr val="AEBEE1"/>
                 </a:solidFill>
-                <a:latin typeface="Microsoft YaHei"/>
+                <a:latin typeface="微软雅黑" panose="020B0503020204020204" charset="-122"/>
               </a:defRPr>
             </a:pPr>
             <a:r>
@@ -16839,7 +16812,7 @@
                 <a:solidFill>
                   <a:srgbClr val="8296C3"/>
                 </a:solidFill>
-                <a:latin typeface="Microsoft YaHei"/>
+                <a:latin typeface="微软雅黑" panose="020B0503020204020204" charset="-122"/>
               </a:defRPr>
             </a:pPr>
             <a:r>
@@ -16875,11 +16848,11 @@
                 <a:solidFill>
                   <a:srgbClr val="3ADCFF"/>
                 </a:solidFill>
-                <a:latin typeface="Microsoft YaHei"/>
-              </a:defRPr>
-            </a:pPr>
-            <a:r>
-              <a:t>08</a:t>
+                <a:latin typeface="微软雅黑" panose="020B0503020204020204" charset="-122"/>
+              </a:defRPr>
+            </a:pPr>
+            <a:r>
+              <a:t>09</a:t>
             </a:r>
           </a:p>
         </p:txBody>
@@ -16999,7 +16972,7 @@
                 <a:solidFill>
                   <a:srgbClr val="F8FAFF"/>
                 </a:solidFill>
-                <a:latin typeface="Microsoft YaHei"/>
+                <a:latin typeface="微软雅黑" panose="020B0503020204020204" charset="-122"/>
               </a:defRPr>
             </a:pPr>
             <a:r>
@@ -17038,11 +17011,11 @@
               <a:spcAft>
                 <a:spcPts val="300"/>
               </a:spcAft>
-              <a:defRPr sz="1019">
+              <a:defRPr sz="1020">
                 <a:solidFill>
                   <a:srgbClr val="AEBEE1"/>
                 </a:solidFill>
-                <a:latin typeface="Microsoft YaHei"/>
+                <a:latin typeface="微软雅黑" panose="020B0503020204020204" charset="-122"/>
               </a:defRPr>
             </a:pPr>
             <a:r>
@@ -17054,11 +17027,11 @@
               <a:spcAft>
                 <a:spcPts val="300"/>
               </a:spcAft>
-              <a:defRPr sz="1019">
+              <a:defRPr sz="1020">
                 <a:solidFill>
                   <a:srgbClr val="AEBEE1"/>
                 </a:solidFill>
-                <a:latin typeface="Microsoft YaHei"/>
+                <a:latin typeface="微软雅黑" panose="020B0503020204020204" charset="-122"/>
               </a:defRPr>
             </a:pPr>
             <a:r>
@@ -17070,11 +17043,11 @@
               <a:spcAft>
                 <a:spcPts val="300"/>
               </a:spcAft>
-              <a:defRPr sz="1019">
+              <a:defRPr sz="1020">
                 <a:solidFill>
                   <a:srgbClr val="AEBEE1"/>
                 </a:solidFill>
-                <a:latin typeface="Microsoft YaHei"/>
+                <a:latin typeface="微软雅黑" panose="020B0503020204020204" charset="-122"/>
               </a:defRPr>
             </a:pPr>
             <a:r>
@@ -17086,11 +17059,11 @@
               <a:spcAft>
                 <a:spcPts val="300"/>
               </a:spcAft>
-              <a:defRPr sz="1019">
+              <a:defRPr sz="1020">
                 <a:solidFill>
                   <a:srgbClr val="AEBEE1"/>
                 </a:solidFill>
-                <a:latin typeface="Microsoft YaHei"/>
+                <a:latin typeface="微软雅黑" panose="020B0503020204020204" charset="-122"/>
               </a:defRPr>
             </a:pPr>
             <a:r>
@@ -17214,7 +17187,7 @@
                 <a:solidFill>
                   <a:srgbClr val="F8FAFF"/>
                 </a:solidFill>
-                <a:latin typeface="Microsoft YaHei"/>
+                <a:latin typeface="微软雅黑" panose="020B0503020204020204" charset="-122"/>
               </a:defRPr>
             </a:pPr>
             <a:r>
@@ -17253,11 +17226,11 @@
               <a:spcAft>
                 <a:spcPts val="300"/>
               </a:spcAft>
-              <a:defRPr sz="1019">
+              <a:defRPr sz="1020">
                 <a:solidFill>
                   <a:srgbClr val="AEBEE1"/>
                 </a:solidFill>
-                <a:latin typeface="Microsoft YaHei"/>
+                <a:latin typeface="微软雅黑" panose="020B0503020204020204" charset="-122"/>
               </a:defRPr>
             </a:pPr>
             <a:r>
@@ -17269,11 +17242,11 @@
               <a:spcAft>
                 <a:spcPts val="300"/>
               </a:spcAft>
-              <a:defRPr sz="1019">
+              <a:defRPr sz="1020">
                 <a:solidFill>
                   <a:srgbClr val="AEBEE1"/>
                 </a:solidFill>
-                <a:latin typeface="Microsoft YaHei"/>
+                <a:latin typeface="微软雅黑" panose="020B0503020204020204" charset="-122"/>
               </a:defRPr>
             </a:pPr>
             <a:r>
@@ -17285,11 +17258,11 @@
               <a:spcAft>
                 <a:spcPts val="300"/>
               </a:spcAft>
-              <a:defRPr sz="1019">
+              <a:defRPr sz="1020">
                 <a:solidFill>
                   <a:srgbClr val="AEBEE1"/>
                 </a:solidFill>
-                <a:latin typeface="Microsoft YaHei"/>
+                <a:latin typeface="微软雅黑" panose="020B0503020204020204" charset="-122"/>
               </a:defRPr>
             </a:pPr>
             <a:r>
@@ -17301,11 +17274,11 @@
               <a:spcAft>
                 <a:spcPts val="300"/>
               </a:spcAft>
-              <a:defRPr sz="1019">
+              <a:defRPr sz="1020">
                 <a:solidFill>
                   <a:srgbClr val="AEBEE1"/>
                 </a:solidFill>
-                <a:latin typeface="Microsoft YaHei"/>
+                <a:latin typeface="微软雅黑" panose="020B0503020204020204" charset="-122"/>
               </a:defRPr>
             </a:pPr>
             <a:r>
@@ -17429,7 +17402,7 @@
                 <a:solidFill>
                   <a:srgbClr val="F8FAFF"/>
                 </a:solidFill>
-                <a:latin typeface="Microsoft YaHei"/>
+                <a:latin typeface="微软雅黑" panose="020B0503020204020204" charset="-122"/>
               </a:defRPr>
             </a:pPr>
             <a:r>
@@ -17468,11 +17441,11 @@
               <a:spcAft>
                 <a:spcPts val="300"/>
               </a:spcAft>
-              <a:defRPr sz="1019">
+              <a:defRPr sz="1020">
                 <a:solidFill>
                   <a:srgbClr val="AEBEE1"/>
                 </a:solidFill>
-                <a:latin typeface="Microsoft YaHei"/>
+                <a:latin typeface="微软雅黑" panose="020B0503020204020204" charset="-122"/>
               </a:defRPr>
             </a:pPr>
             <a:r>
@@ -17484,11 +17457,11 @@
               <a:spcAft>
                 <a:spcPts val="300"/>
               </a:spcAft>
-              <a:defRPr sz="1019">
+              <a:defRPr sz="1020">
                 <a:solidFill>
                   <a:srgbClr val="AEBEE1"/>
                 </a:solidFill>
-                <a:latin typeface="Microsoft YaHei"/>
+                <a:latin typeface="微软雅黑" panose="020B0503020204020204" charset="-122"/>
               </a:defRPr>
             </a:pPr>
             <a:r>
@@ -17500,11 +17473,11 @@
               <a:spcAft>
                 <a:spcPts val="300"/>
               </a:spcAft>
-              <a:defRPr sz="1019">
+              <a:defRPr sz="1020">
                 <a:solidFill>
                   <a:srgbClr val="AEBEE1"/>
                 </a:solidFill>
-                <a:latin typeface="Microsoft YaHei"/>
+                <a:latin typeface="微软雅黑" panose="020B0503020204020204" charset="-122"/>
               </a:defRPr>
             </a:pPr>
             <a:r>
@@ -17516,11 +17489,11 @@
               <a:spcAft>
                 <a:spcPts val="300"/>
               </a:spcAft>
-              <a:defRPr sz="1019">
+              <a:defRPr sz="1020">
                 <a:solidFill>
                   <a:srgbClr val="AEBEE1"/>
                 </a:solidFill>
-                <a:latin typeface="Microsoft YaHei"/>
+                <a:latin typeface="微软雅黑" panose="020B0503020204020204" charset="-122"/>
               </a:defRPr>
             </a:pPr>
             <a:r>
@@ -17644,7 +17617,7 @@
                 <a:solidFill>
                   <a:srgbClr val="F8FAFF"/>
                 </a:solidFill>
-                <a:latin typeface="Microsoft YaHei"/>
+                <a:latin typeface="微软雅黑" panose="020B0503020204020204" charset="-122"/>
               </a:defRPr>
             </a:pPr>
             <a:r>
@@ -17683,11 +17656,11 @@
               <a:spcAft>
                 <a:spcPts val="300"/>
               </a:spcAft>
-              <a:defRPr sz="1019">
+              <a:defRPr sz="1020">
                 <a:solidFill>
                   <a:srgbClr val="AEBEE1"/>
                 </a:solidFill>
-                <a:latin typeface="Microsoft YaHei"/>
+                <a:latin typeface="微软雅黑" panose="020B0503020204020204" charset="-122"/>
               </a:defRPr>
             </a:pPr>
             <a:r>
@@ -17699,11 +17672,11 @@
               <a:spcAft>
                 <a:spcPts val="300"/>
               </a:spcAft>
-              <a:defRPr sz="1019">
+              <a:defRPr sz="1020">
                 <a:solidFill>
                   <a:srgbClr val="AEBEE1"/>
                 </a:solidFill>
-                <a:latin typeface="Microsoft YaHei"/>
+                <a:latin typeface="微软雅黑" panose="020B0503020204020204" charset="-122"/>
               </a:defRPr>
             </a:pPr>
             <a:r>
@@ -17715,11 +17688,11 @@
               <a:spcAft>
                 <a:spcPts val="300"/>
               </a:spcAft>
-              <a:defRPr sz="1019">
+              <a:defRPr sz="1020">
                 <a:solidFill>
                   <a:srgbClr val="AEBEE1"/>
                 </a:solidFill>
-                <a:latin typeface="Microsoft YaHei"/>
+                <a:latin typeface="微软雅黑" panose="020B0503020204020204" charset="-122"/>
               </a:defRPr>
             </a:pPr>
             <a:r>
@@ -17731,11 +17704,11 @@
               <a:spcAft>
                 <a:spcPts val="300"/>
               </a:spcAft>
-              <a:defRPr sz="1019">
+              <a:defRPr sz="1020">
                 <a:solidFill>
                   <a:srgbClr val="AEBEE1"/>
                 </a:solidFill>
-                <a:latin typeface="Microsoft YaHei"/>
+                <a:latin typeface="微软雅黑" panose="020B0503020204020204" charset="-122"/>
               </a:defRPr>
             </a:pPr>
             <a:r>
@@ -17771,7 +17744,7 @@
                 <a:solidFill>
                   <a:srgbClr val="F8FAFF"/>
                 </a:solidFill>
-                <a:latin typeface="Microsoft YaHei"/>
+                <a:latin typeface="微软雅黑" panose="020B0503020204020204" charset="-122"/>
               </a:defRPr>
             </a:pPr>
             <a:r>
@@ -17789,7 +17762,7 @@
 </file>
 
 <file path=ppt/slides/slide9.xml><?xml version="1.0" encoding="utf-8"?>
-<p:sld xmlns:a="http://schemas.openxmlformats.org/drawingml/2006/main" xmlns:p="http://schemas.openxmlformats.org/presentationml/2006/main" xmlns:r="http://schemas.openxmlformats.org/officeDocument/2006/relationships">
+<p:sld xmlns:a="http://schemas.openxmlformats.org/drawingml/2006/main" xmlns:r="http://schemas.openxmlformats.org/officeDocument/2006/relationships" xmlns:p="http://schemas.openxmlformats.org/presentationml/2006/main">
   <p:cSld>
     <p:spTree>
       <p:nvGrpSpPr>
@@ -18277,7 +18250,7 @@
                 <a:solidFill>
                   <a:srgbClr val="F8FAFF"/>
                 </a:solidFill>
-                <a:latin typeface="Microsoft YaHei"/>
+                <a:latin typeface="微软雅黑" panose="020B0503020204020204" charset="-122"/>
               </a:defRPr>
             </a:pPr>
             <a:r>
@@ -18313,7 +18286,7 @@
                 <a:solidFill>
                   <a:srgbClr val="AEBEE1"/>
                 </a:solidFill>
-                <a:latin typeface="Microsoft YaHei"/>
+                <a:latin typeface="微软雅黑" panose="020B0503020204020204" charset="-122"/>
               </a:defRPr>
             </a:pPr>
             <a:r>
@@ -18392,7 +18365,7 @@
                 <a:solidFill>
                   <a:srgbClr val="8296C3"/>
                 </a:solidFill>
-                <a:latin typeface="Microsoft YaHei"/>
+                <a:latin typeface="微软雅黑" panose="020B0503020204020204" charset="-122"/>
               </a:defRPr>
             </a:pPr>
             <a:r>
@@ -18428,11 +18401,11 @@
                 <a:solidFill>
                   <a:srgbClr val="3ADCFF"/>
                 </a:solidFill>
-                <a:latin typeface="Microsoft YaHei"/>
-              </a:defRPr>
-            </a:pPr>
-            <a:r>
-              <a:t>09</a:t>
+                <a:latin typeface="微软雅黑" panose="020B0503020204020204" charset="-122"/>
+              </a:defRPr>
+            </a:pPr>
+            <a:r>
+              <a:t>10</a:t>
             </a:r>
           </a:p>
         </p:txBody>
@@ -18552,7 +18525,7 @@
                 <a:solidFill>
                   <a:srgbClr val="F8FAFF"/>
                 </a:solidFill>
-                <a:latin typeface="Microsoft YaHei"/>
+                <a:latin typeface="微软雅黑" panose="020B0503020204020204" charset="-122"/>
               </a:defRPr>
             </a:pPr>
             <a:r>
@@ -18587,11 +18560,11 @@
               <a:spcAft>
                 <a:spcPts val="300"/>
               </a:spcAft>
-              <a:defRPr sz="1019">
+              <a:defRPr sz="1020">
                 <a:solidFill>
                   <a:srgbClr val="AEBEE1"/>
                 </a:solidFill>
-                <a:latin typeface="Microsoft YaHei"/>
+                <a:latin typeface="微软雅黑" panose="020B0503020204020204" charset="-122"/>
               </a:defRPr>
             </a:pPr>
             <a:r>
@@ -18715,7 +18688,7 @@
                 <a:solidFill>
                   <a:srgbClr val="F8FAFF"/>
                 </a:solidFill>
-                <a:latin typeface="Microsoft YaHei"/>
+                <a:latin typeface="微软雅黑" panose="020B0503020204020204" charset="-122"/>
               </a:defRPr>
             </a:pPr>
             <a:r>
@@ -18750,11 +18723,11 @@
               <a:spcAft>
                 <a:spcPts val="300"/>
               </a:spcAft>
-              <a:defRPr sz="1019">
+              <a:defRPr sz="1020">
                 <a:solidFill>
                   <a:srgbClr val="AEBEE1"/>
                 </a:solidFill>
-                <a:latin typeface="Microsoft YaHei"/>
+                <a:latin typeface="微软雅黑" panose="020B0503020204020204" charset="-122"/>
               </a:defRPr>
             </a:pPr>
             <a:r>
@@ -18878,7 +18851,7 @@
                 <a:solidFill>
                   <a:srgbClr val="F8FAFF"/>
                 </a:solidFill>
-                <a:latin typeface="Microsoft YaHei"/>
+                <a:latin typeface="微软雅黑" panose="020B0503020204020204" charset="-122"/>
               </a:defRPr>
             </a:pPr>
             <a:r>
@@ -18913,11 +18886,11 @@
               <a:spcAft>
                 <a:spcPts val="300"/>
               </a:spcAft>
-              <a:defRPr sz="1019">
+              <a:defRPr sz="1020">
                 <a:solidFill>
                   <a:srgbClr val="AEBEE1"/>
                 </a:solidFill>
-                <a:latin typeface="Microsoft YaHei"/>
+                <a:latin typeface="微软雅黑" panose="020B0503020204020204" charset="-122"/>
               </a:defRPr>
             </a:pPr>
             <a:r>
@@ -19041,7 +19014,7 @@
                 <a:solidFill>
                   <a:srgbClr val="F8FAFF"/>
                 </a:solidFill>
-                <a:latin typeface="Microsoft YaHei"/>
+                <a:latin typeface="微软雅黑" panose="020B0503020204020204" charset="-122"/>
               </a:defRPr>
             </a:pPr>
             <a:r>
@@ -19076,11 +19049,11 @@
               <a:spcAft>
                 <a:spcPts val="300"/>
               </a:spcAft>
-              <a:defRPr sz="1019">
+              <a:defRPr sz="1020">
                 <a:solidFill>
                   <a:srgbClr val="AEBEE1"/>
                 </a:solidFill>
-                <a:latin typeface="Microsoft YaHei"/>
+                <a:latin typeface="微软雅黑" panose="020B0503020204020204" charset="-122"/>
               </a:defRPr>
             </a:pPr>
             <a:r>
@@ -19204,7 +19177,7 @@
                 <a:solidFill>
                   <a:srgbClr val="F8FAFF"/>
                 </a:solidFill>
-                <a:latin typeface="Microsoft YaHei"/>
+                <a:latin typeface="微软雅黑" panose="020B0503020204020204" charset="-122"/>
               </a:defRPr>
             </a:pPr>
             <a:r>
@@ -19239,11 +19212,11 @@
               <a:spcAft>
                 <a:spcPts val="300"/>
               </a:spcAft>
-              <a:defRPr sz="1019">
+              <a:defRPr sz="1020">
                 <a:solidFill>
                   <a:srgbClr val="AEBEE1"/>
                 </a:solidFill>
-                <a:latin typeface="Microsoft YaHei"/>
+                <a:latin typeface="微软雅黑" panose="020B0503020204020204" charset="-122"/>
               </a:defRPr>
             </a:pPr>
             <a:r>
@@ -19367,7 +19340,7 @@
                 <a:solidFill>
                   <a:srgbClr val="F8FAFF"/>
                 </a:solidFill>
-                <a:latin typeface="Microsoft YaHei"/>
+                <a:latin typeface="微软雅黑" panose="020B0503020204020204" charset="-122"/>
               </a:defRPr>
             </a:pPr>
             <a:r>
@@ -19402,11 +19375,11 @@
               <a:spcAft>
                 <a:spcPts val="300"/>
               </a:spcAft>
-              <a:defRPr sz="1019">
+              <a:defRPr sz="1020">
                 <a:solidFill>
                   <a:srgbClr val="AEBEE1"/>
                 </a:solidFill>
-                <a:latin typeface="Microsoft YaHei"/>
+                <a:latin typeface="微软雅黑" panose="020B0503020204020204" charset="-122"/>
               </a:defRPr>
             </a:pPr>
             <a:r>
@@ -19442,7 +19415,7 @@
                 <a:solidFill>
                   <a:srgbClr val="F8FAFF"/>
                 </a:solidFill>
-                <a:latin typeface="Microsoft YaHei"/>
+                <a:latin typeface="微软雅黑" panose="020B0503020204020204" charset="-122"/>
               </a:defRPr>
             </a:pPr>
             <a:r>
@@ -19775,6 +19748,10 @@
       </a:style>
     </a:lnDef>
   </a:objectDefaults>
-  <a:extraClrSchemeLst/>
+  <a:extLst>
+    <a:ext uri="{05A4C25C-085E-4340-85A3-A5531E510DB2}">
+      <thm15:themeFamily xmlns:thm15="http://schemas.microsoft.com/office/thememl/2012/main" name="Office Theme" id="{62F939B6-93AF-4DB8-9C6B-D6C7DFDC589F}" vid="{4A3C46E8-61CC-4603-A589-7422A47A8E4A}"/>
+    </a:ext>
+  </a:extLst>
 </a:theme>
 </file>